--- a/ai-tarot-projection-pitch.pptx
+++ b/ai-tarot-projection-pitch.pptx
@@ -4,9 +4,6 @@
   <p:sldMasterIdLst>
     <p:sldMasterId id="2147483648" r:id="rId1"/>
   </p:sldMasterIdLst>
-  <p:notesMasterIdLst>
-    <p:notesMasterId r:id="rId13"/>
-  </p:notesMasterIdLst>
   <p:sldIdLst>
     <p:sldId id="256" r:id="rId2"/>
     <p:sldId id="257" r:id="rId3"/>
@@ -20,6 +17,9 @@
     <p:sldId id="265" r:id="rId11"/>
     <p:sldId id="266" r:id="rId12"/>
   </p:sldIdLst>
+  <p:notesMasterIdLst>
+    <p:notesMasterId r:id="rId13"/>
+  </p:notesMasterIdLst>
   <p:sldSz cx="12192000" cy="6858000"/>
   <p:notesSz cx="6858000" cy="12192000"/>
   <p:defaultTextStyle>
@@ -114,11 +114,6 @@
       </a:defRPr>
     </a:lvl9pPr>
   </p:defaultTextStyle>
-  <p:extLst>
-    <p:ext uri="{EFAFB233-063F-42B5-8137-9DF3F51BA10A}">
-      <p15:sldGuideLst xmlns:p15="http://schemas.microsoft.com/office/powerpoint/2012/main"/>
-    </p:ext>
-  </p:extLst>
 </p:presentation>
 </file>
 
@@ -144,10 +139,234 @@
           <a:chExt cx="0" cy="0"/>
         </a:xfrm>
       </p:grpSpPr>
+      <p:sp>
+        <p:nvSpPr>
+          <p:cNvPr id="2" name="Header Placeholder 1"/>
+          <p:cNvSpPr>
+            <a:spLocks noGrp="1"/>
+          </p:cNvSpPr>
+          <p:nvPr>
+            <p:ph type="hdr" sz="quarter"/>
+          </p:nvPr>
+        </p:nvSpPr>
+        <p:spPr>
+          <a:xfrm>
+            <a:off x="0" y="0"/>
+            <a:ext cx="2971800" cy="458788"/>
+          </a:xfrm>
+          <a:prstGeom prst="rect">
+            <a:avLst/>
+          </a:prstGeom>
+        </p:spPr>
+        <p:txBody>
+          <a:bodyPr vert="horz" lIns="91440" tIns="45720" rIns="91440" bIns="45720" rtlCol="0"/>
+          <a:lstStyle>
+            <a:lvl1pPr algn="l">
+              <a:defRPr sz="1200"/>
+            </a:lvl1pPr>
+          </a:lstStyle>
+          <a:p>
+            <a:endParaRPr lang="en-US"/>
+          </a:p>
+        </p:txBody>
+      </p:sp>
+      <p:sp>
+        <p:nvSpPr>
+          <p:cNvPr id="3" name="Date Placeholder 2"/>
+          <p:cNvSpPr>
+            <a:spLocks noGrp="1"/>
+          </p:cNvSpPr>
+          <p:nvPr>
+            <p:ph type="dt" idx="1"/>
+          </p:nvPr>
+        </p:nvSpPr>
+        <p:spPr>
+          <a:xfrm>
+            <a:off x="3884613" y="0"/>
+            <a:ext cx="2971800" cy="458788"/>
+          </a:xfrm>
+          <a:prstGeom prst="rect">
+            <a:avLst/>
+          </a:prstGeom>
+        </p:spPr>
+        <p:txBody>
+          <a:bodyPr vert="horz" lIns="91440" tIns="45720" rIns="91440" bIns="45720" rtlCol="0"/>
+          <a:lstStyle>
+            <a:lvl1pPr algn="r">
+              <a:defRPr sz="1200"/>
+            </a:lvl1pPr>
+          </a:lstStyle>
+          <a:p>
+            <a:fld id="{5282F153-3F37-0F45-9E97-73ACFA13230C}" type="datetimeFigureOut">
+              <a:rPr lang="en-US"/>
+              <a:t>7/23/19</a:t>
+            </a:fld>
+            <a:endParaRPr lang="en-US"/>
+          </a:p>
+        </p:txBody>
+      </p:sp>
+      <p:sp>
+        <p:nvSpPr>
+          <p:cNvPr id="4" name="Slide Image Placeholder 3"/>
+          <p:cNvSpPr>
+            <a:spLocks noGrp="1" noRot="1" noChangeAspect="1"/>
+          </p:cNvSpPr>
+          <p:nvPr>
+            <p:ph type="sldImg" idx="2"/>
+          </p:nvPr>
+        </p:nvSpPr>
+        <p:spPr>
+          <a:xfrm>
+            <a:off x="685800" y="1143000"/>
+            <a:ext cx="5486400" cy="3086100"/>
+          </a:xfrm>
+          <a:prstGeom prst="rect">
+            <a:avLst/>
+          </a:prstGeom>
+          <a:noFill/>
+          <a:ln w="12700">
+            <a:solidFill>
+              <a:prstClr val="black"/>
+            </a:solidFill>
+          </a:ln>
+        </p:spPr>
+        <p:txBody>
+          <a:bodyPr vert="horz" lIns="91440" tIns="45720" rIns="91440" bIns="45720" rtlCol="0" anchor="ctr"/>
+          <a:lstStyle/>
+          <a:p>
+            <a:endParaRPr lang="en-US"/>
+          </a:p>
+        </p:txBody>
+      </p:sp>
+      <p:sp>
+        <p:nvSpPr>
+          <p:cNvPr id="5" name="Notes Placeholder 4"/>
+          <p:cNvSpPr>
+            <a:spLocks noGrp="1"/>
+          </p:cNvSpPr>
+          <p:nvPr>
+            <p:ph type="body" sz="quarter" idx="3"/>
+          </p:nvPr>
+        </p:nvSpPr>
+        <p:spPr>
+          <a:xfrm>
+            <a:off x="685800" y="4400550"/>
+            <a:ext cx="5486400" cy="3600450"/>
+          </a:xfrm>
+          <a:prstGeom prst="rect">
+            <a:avLst/>
+          </a:prstGeom>
+        </p:spPr>
+        <p:txBody>
+          <a:bodyPr vert="horz" lIns="91440" tIns="45720" rIns="91440" bIns="45720" rtlCol="0"/>
+          <a:lstStyle/>
+          <a:p>
+            <a:pPr lvl="0"/>
+            <a:r>
+              <a:rPr lang="en-US"/>
+              <a:t>Click to edit Master text styles</a:t>
+            </a:r>
+          </a:p>
+          <a:p>
+            <a:pPr lvl="1"/>
+            <a:r>
+              <a:rPr lang="en-US"/>
+              <a:t>Second level</a:t>
+            </a:r>
+          </a:p>
+          <a:p>
+            <a:pPr lvl="2"/>
+            <a:r>
+              <a:rPr lang="en-US"/>
+              <a:t>Third level</a:t>
+            </a:r>
+          </a:p>
+          <a:p>
+            <a:pPr lvl="3"/>
+            <a:r>
+              <a:rPr lang="en-US"/>
+              <a:t>Fourth level</a:t>
+            </a:r>
+          </a:p>
+          <a:p>
+            <a:pPr lvl="4"/>
+            <a:r>
+              <a:rPr lang="en-US"/>
+              <a:t>Fifth level</a:t>
+            </a:r>
+          </a:p>
+        </p:txBody>
+      </p:sp>
+      <p:sp>
+        <p:nvSpPr>
+          <p:cNvPr id="6" name="Footer Placeholder 5"/>
+          <p:cNvSpPr>
+            <a:spLocks noGrp="1"/>
+          </p:cNvSpPr>
+          <p:nvPr>
+            <p:ph type="ftr" sz="quarter" idx="4"/>
+          </p:nvPr>
+        </p:nvSpPr>
+        <p:spPr>
+          <a:xfrm>
+            <a:off x="0" y="8685213"/>
+            <a:ext cx="2971800" cy="458787"/>
+          </a:xfrm>
+          <a:prstGeom prst="rect">
+            <a:avLst/>
+          </a:prstGeom>
+        </p:spPr>
+        <p:txBody>
+          <a:bodyPr vert="horz" lIns="91440" tIns="45720" rIns="91440" bIns="45720" rtlCol="0" anchor="b"/>
+          <a:lstStyle>
+            <a:lvl1pPr algn="l">
+              <a:defRPr sz="1200"/>
+            </a:lvl1pPr>
+          </a:lstStyle>
+          <a:p>
+            <a:endParaRPr lang="en-US"/>
+          </a:p>
+        </p:txBody>
+      </p:sp>
+      <p:sp>
+        <p:nvSpPr>
+          <p:cNvPr id="7" name="Slide Number Placeholder 6"/>
+          <p:cNvSpPr>
+            <a:spLocks noGrp="1"/>
+          </p:cNvSpPr>
+          <p:nvPr>
+            <p:ph type="sldNum" sz="quarter" idx="5"/>
+          </p:nvPr>
+        </p:nvSpPr>
+        <p:spPr>
+          <a:xfrm>
+            <a:off x="3884613" y="8685213"/>
+            <a:ext cx="2971800" cy="458787"/>
+          </a:xfrm>
+          <a:prstGeom prst="rect">
+            <a:avLst/>
+          </a:prstGeom>
+        </p:spPr>
+        <p:txBody>
+          <a:bodyPr vert="horz" lIns="91440" tIns="45720" rIns="91440" bIns="45720" rtlCol="0" anchor="b"/>
+          <a:lstStyle>
+            <a:lvl1pPr algn="r">
+              <a:defRPr sz="1200"/>
+            </a:lvl1pPr>
+          </a:lstStyle>
+          <a:p>
+            <a:fld id="{CE5E9CC1-C706-0F49-92D6-E571CC5EEA8F}" type="slidenum">
+              <a:rPr lang="en-US"/>
+              <a:t>‹#›</a:t>
+            </a:fld>
+            <a:endParaRPr lang="en-US"/>
+          </a:p>
+        </p:txBody>
+      </p:sp>
     </p:spTree>
     <p:extLst>
       <p:ext uri="{BB962C8B-B14F-4D97-AF65-F5344CB8AC3E}">
-        <p14:creationId xmlns:p14="http://schemas.microsoft.com/office/powerpoint/2010/main" val="437876843"/>
+        <p14:creationId xmlns:p14="http://schemas.microsoft.com/office/powerpoint/2010/main" val="1024086991"/>
       </p:ext>
     </p:extLst>
   </p:cSld>
@@ -295,6 +514,7 @@
               <a:rPr lang="en-US" dirty="0"/>
               <a:t>Opening: this is a tarot app for skeptics. The pitch in one line: tarot cards as a projective surface, something specific and strange to point at, so the thing you actually wanted to say has an easier route out. The AI reader never predicts; it hands your own words back to you in an order you hadn't tried.</a:t>
             </a:r>
+            <a:endParaRPr lang="en-US" dirty="0"/>
           </a:p>
         </p:txBody>
       </p:sp>
@@ -382,6 +602,7 @@
               <a:rPr lang="en-US" dirty="0"/>
               <a:t>Ordered by leverage. Custom decks: packs are pure data, so a Marseille pack proves swappability, a zh-CN variant opens a market, a secular 'reflection cards' pack serves people the tarot frame puts off, and commissioned original art becomes a premium deck. Zodiac: most people who believe in tarot also follow astrology, so a birth-chart layer is a second symbol system on the same engine, and a date-seeded daily card is the ritual hook that brings people back. Memory: familiarity stages, where the reader earns the right to remember across sessions, with an explicit memory screen and export/import, still nothing server-side. Beyond tarot: the engine is deliberately generic; the same core can back a journaling companion or an embeddable reflection chat. Physical-deck mode already shipped: lay your real cards face down, turn them by hand, tell the app what you drew.</a:t>
             </a:r>
+            <a:endParaRPr lang="en-US" dirty="0"/>
           </a:p>
         </p:txBody>
       </p:sp>
@@ -469,6 +690,7 @@
               <a:rPr lang="en-US" dirty="0"/>
               <a:t>Close on the product's own line: the un-earned fourth card is the retention mechanic and the emotional thesis in one sentence. Invite the audience to try a reading with their own key, or with their own physical deck.</a:t>
             </a:r>
+            <a:endParaRPr lang="en-US" dirty="0"/>
           </a:p>
         </p:txBody>
       </p:sp>
@@ -556,6 +778,7 @@
               <a:rPr lang="en-US" dirty="0"/>
               <a:t>The core reframe: for the target user, tarot's value is not divination. A strange, specific image is easier to talk through than a blank 'how are you feeling?'. Three design consequences: (1) the app never describes the picture, because a printed description is something to agree with, and agreeing is not projecting; (2) the user's projection is the disclosure, and the reader builds only on their words; (3) talking through a layout keeps the card as a mediating third object, which is what lowers resistance. The deck is a pretext for the conversation the person was already trying to have.</a:t>
             </a:r>
+            <a:endParaRPr lang="en-US" dirty="0"/>
           </a:p>
         </p:txBody>
       </p:sp>
@@ -649,6 +872,7 @@
 5) Ramey, H. L., Young, K., &amp; Tarulli, D. (2010). Scaffolding and concept formation in narrative therapy: A qualitative research report. Journal of Systemic Therapies, 29(4), 74-91. https://guilfordjournals.com/doi/10.1521/jsyt.2010.29.4.74 . Note: the repo plan cites this as Journal of Marital and Family Therapy; the actual venue is Journal of Systemic Therapies.
 Lineage: projective techniques in counseling run back through Clark (1995) and Pepinsky (1947), per Clinton's review.</a:t>
             </a:r>
+            <a:endParaRPr lang="en-US" dirty="0"/>
           </a:p>
         </p:txBody>
       </p:sp>
@@ -736,6 +960,7 @@
               <a:rPr lang="en-US" dirty="0"/>
               <a:t>Flip-gating is the signature mechanic: face-down cards ahead are the incentive made physical. Rhythm per card: flip, your projection, follow-up, next flip. Depth decides, not turn count: a rich answer can flip early, a thin answer gets a softer follow-up instead of a stall, and a fresh disclosure gets dwelled in for one exchange rather than skipped past, because flipping on a disclosure would teach that opening up ends the subject. The fourth card is earned by something of your own, unhedged, on the advice card. Not earned, the closing names it once as an invitation, never as a grade. That line is the return hook.</a:t>
             </a:r>
+            <a:endParaRPr lang="en-US" dirty="0"/>
           </a:p>
         </p:txBody>
       </p:sp>
@@ -823,6 +1048,7 @@
               <a:rPr lang="en-US" dirty="0"/>
               <a:t>Coherence is designed in, not patched on. The anchor is committed after card one, built from the user's own projection: theme, their phrases verbatim, and where the session should land. It is re-stated to the model every turn and declared to outrank the conversation history: constraint, not suggestion. The ledger records every card drawn and every read given; new draws elaborate and never contradict, so spamming a re-draw gets 'the deck answers the same question the same way.' Together they make the deck feel like one narrator with a memory rather than a slot machine.</a:t>
             </a:r>
+            <a:endParaRPr lang="en-US" dirty="0"/>
           </a:p>
         </p:txBody>
       </p:sp>
@@ -908,8 +1134,10 @@
           <a:p>
             <a:r>
               <a:rPr lang="en-US" dirty="0"/>
-              <a:t>The question engine: five distancing levels from narrative therapy, with a +1 movement rule. The target is one rung above the user's last answer, capped per card position (situation caps at evaluate, obstacle at intentions, advice opens plans). People who jump levels unprompted get met there: followed, never marched. A rail-crossing question targets the current level, because crossing is already the step. A deflection drops the target and the next question comes back smaller. Every rule exists because a transcript showed the failure, and a protocol scanner now flags each violation (level_jump, rail_switch_climb, rail_switch_unsettled). The level trace of a session is a primary A/B metric.</a:t>
-            </a:r>
+              <a:t>Important separation: the ladder decides how high the next QUESTION aims; card FLIPS are a different mechanism. A judge scores each answer's disclosure depth, and depth is what earns the flip (depth-gated, not turn-count-gated). So someone can climb the ladder without flipping a card, and a rich answer can flip early. A fresh disclosure even delays the flip by one exchange (the dwell rule), so opening up never ends its own card.
+The question engine: five distancing levels from narrative therapy, with a +1 movement rule. The target is one rung above the user's last answer, capped per card position (situation caps at evaluate, obstacle at intentions, advice opens plans). People who jump levels unprompted get met there: followed, never marched. A rail-crossing question targets the current level, because crossing is already the step. A deflection drops the target and the next question comes back smaller. Every rule exists because a transcript showed the failure, and a protocol scanner now flags each violation (level_jump, rail_switch_climb, rail_switch_unsettled). The level trace of a session is a primary A/B metric.</a:t>
+            </a:r>
+            <a:endParaRPr lang="en-US" dirty="0"/>
           </a:p>
         </p:txBody>
       </p:sp>
@@ -997,6 +1225,7 @@
               <a:rPr lang="en-US" dirty="0"/>
               <a:t>The prompt is assembled in two halves, and the split is load-bearing. readerSystem is the stable prefix: persona, few-shots, standing rules, spread, topic. About 22 KB, identical every turn, which is exactly what a provider can cache (cache_control on Anthropic, automatic prefix caching elsewhere). The turn block is what changes: the session record assembled from state (anchor with the user's verbatim phrases, one line per card, arc position, depth, safety state), the resolved card, the ladder target, and the turn instruction. About 3 KB, sent in the last user message after the transcript. The transcript itself is only the last 10 exchanges, affordable because everything a later turn must stay consistent with lives in the recap block, which is declared to outrank the history: the old turns are texture, not record. Two more properties worth saying out loud: the turn is decided before it is written (turnPlan() returns the turn's decisions as data, and the prose renders from that plan, so rules are testable against data rather than English); and prompts are data, not code: persona, few-shots and packs are static files, so editing a prompt is a file save, with no redeploy and no relay change.</a:t>
             </a:r>
+            <a:endParaRPr lang="en-US" dirty="0"/>
           </a:p>
         </p:txBody>
       </p:sp>
@@ -1085,6 +1314,7 @@
               <a:t>Safety: the flip gate classifies stakes on every answer, before a single card turns. Low: the normal reading, with one quiet onboarding line saying this is reflection, not therapy or crisis support. High (medical, legal, financial): the tarot frame stays but agency is handed back explicitly: 'the cards can help you think; this needs a professional and real information.' Crisis (grief, self-harm): the reader exits the tarot voice entirely, answers plainly, and points at real resources. Correction wins: dispute an observation and the anchor updates with your words; the cold-reading move of treating disagreement as resistance is ruled out by design, and a protocol scanner machine-checks every transcript.
 Privacy: no account, no server that remembers you. Three key paths: direct (works where provider CORS allows), your own relay, or the hosted Cloudflare Worker. The key arrives per request in the Authorization header, is used inside that request, and is gone: never stored, never logged, never echoed back, redacted by header name and by value. The Worker has no logging code path at all, not a disabled one, so hosted conversations are unloggable by construction. One 20-assertion contract suite runs against both relays, including a canary key checked against every error branch, and the frontend cannot tell which relay answered. Session state lives client-side only.</a:t>
             </a:r>
+            <a:endParaRPr lang="en-US" dirty="0"/>
           </a:p>
         </p:txBody>
       </p:sp>
@@ -1172,6 +1402,7 @@
               <a:rPr lang="en-US" dirty="0"/>
               <a:t>Four defensible differences against Aluma, TAROGO and Inner Arcana, whose spreads are static pages with chat underneath. Flip-gating is the moat: it changes the incentive structure of the session, since opening up is what turns cards over, and it took the whole narrative-map machinery to make that feel like pacing rather than a paywall. Coherence: competitors patch contradictions with cooldowns; here the anchor and ledger prevent them structurally. Privacy: competitors ask for trust; this hands you three hundred readable lines and a contract test suite. Packs: the whole symbol system (cards, meanings, persona, few-shots) is a data pack, which makes the engine reusable beyond tarot.</a:t>
             </a:r>
+            <a:endParaRPr lang="en-US" dirty="0"/>
           </a:p>
         </p:txBody>
       </p:sp>
@@ -1244,11 +1475,6 @@
 <file path=ppt/slideMasters/slideMaster1.xml><?xml version="1.0" encoding="utf-8"?>
 <p:sldMaster xmlns:a="http://schemas.openxmlformats.org/drawingml/2006/main" xmlns:r="http://schemas.openxmlformats.org/officeDocument/2006/relationships" xmlns:p="http://schemas.openxmlformats.org/presentationml/2006/main">
   <p:cSld>
-    <p:bg>
-      <p:bgRef idx="1001">
-        <a:schemeClr val="bg1"/>
-      </p:bgRef>
-    </p:bg>
     <p:spTree>
       <p:nvGrpSpPr>
         <p:cNvPr id="1" name=""/>
@@ -1531,7 +1757,6 @@
         <a:solidFill>
           <a:srgbClr val="231C40"/>
         </a:solidFill>
-        <a:effectLst/>
       </p:bgPr>
     </p:bg>
     <p:spTree>
@@ -1550,7 +1775,55 @@
       </p:grpSpPr>
       <p:pic>
         <p:nvPicPr>
-          <p:cNvPr id="2" name="Image 0" descr="/mnt/user-data/uploads/ai-tarot-projection/data/Cards-jpg/CardBacks.jpg"/>
+          <p:cNvPr id="2" name="Image 0" descr="/mnt/user-data/uploads/ai-tarot-projection/data/Cards-jpg/CardBacks.jpg">    </p:cNvPr>
+          <p:cNvPicPr>
+            <a:picLocks noChangeAspect="1"/>
+          </p:cNvPicPr>
+          <p:nvPr/>
+        </p:nvPicPr>
+        <p:blipFill>
+          <a:blip r:embed="rId1"/>
+          <a:stretch>
+            <a:fillRect/>
+          </a:stretch>
+        </p:blipFill>
+        <p:spPr>
+          <a:xfrm rot="21120000">
+            <a:off x="7635240" y="1920240"/>
+            <a:ext cx="1874520" cy="3291840"/>
+          </a:xfrm>
+          <a:prstGeom prst="rect">
+            <a:avLst/>
+          </a:prstGeom>
+        </p:spPr>
+      </p:pic>
+      <p:pic>
+        <p:nvPicPr>
+          <p:cNvPr id="3" name="Image 1" descr="/mnt/user-data/uploads/ai-tarot-projection/data/Cards-jpg/CardBacks.jpg">    </p:cNvPr>
+          <p:cNvPicPr>
+            <a:picLocks noChangeAspect="1"/>
+          </p:cNvPicPr>
+          <p:nvPr/>
+        </p:nvPicPr>
+        <p:blipFill>
+          <a:blip r:embed="rId2"/>
+          <a:stretch>
+            <a:fillRect/>
+          </a:stretch>
+        </p:blipFill>
+        <p:spPr>
+          <a:xfrm>
+            <a:off x="8732520" y="1737360"/>
+            <a:ext cx="1874520" cy="3291840"/>
+          </a:xfrm>
+          <a:prstGeom prst="rect">
+            <a:avLst/>
+          </a:prstGeom>
+        </p:spPr>
+      </p:pic>
+      <p:pic>
+        <p:nvPicPr>
+          <p:cNvPr id="4" name="Image 2" descr="/mnt/user-data/uploads/ai-tarot-projection/data/Cards-jpg/CardBacks.jpg">    </p:cNvPr>
           <p:cNvPicPr>
             <a:picLocks noChangeAspect="1"/>
           </p:cNvPicPr>
@@ -1563,54 +1836,6 @@
           </a:stretch>
         </p:blipFill>
         <p:spPr>
-          <a:xfrm rot="21120000">
-            <a:off x="7635240" y="1920240"/>
-            <a:ext cx="1874520" cy="3291840"/>
-          </a:xfrm>
-          <a:prstGeom prst="rect">
-            <a:avLst/>
-          </a:prstGeom>
-        </p:spPr>
-      </p:pic>
-      <p:pic>
-        <p:nvPicPr>
-          <p:cNvPr id="3" name="Image 1" descr="/mnt/user-data/uploads/ai-tarot-projection/data/Cards-jpg/CardBacks.jpg"/>
-          <p:cNvPicPr>
-            <a:picLocks noChangeAspect="1"/>
-          </p:cNvPicPr>
-          <p:nvPr/>
-        </p:nvPicPr>
-        <p:blipFill>
-          <a:blip r:embed="rId3"/>
-          <a:stretch>
-            <a:fillRect/>
-          </a:stretch>
-        </p:blipFill>
-        <p:spPr>
-          <a:xfrm>
-            <a:off x="8732520" y="1737360"/>
-            <a:ext cx="1874520" cy="3291840"/>
-          </a:xfrm>
-          <a:prstGeom prst="rect">
-            <a:avLst/>
-          </a:prstGeom>
-        </p:spPr>
-      </p:pic>
-      <p:pic>
-        <p:nvPicPr>
-          <p:cNvPr id="4" name="Image 2" descr="/mnt/user-data/uploads/ai-tarot-projection/data/Cards-jpg/CardBacks.jpg"/>
-          <p:cNvPicPr>
-            <a:picLocks noChangeAspect="1"/>
-          </p:cNvPicPr>
-          <p:nvPr/>
-        </p:nvPicPr>
-        <p:blipFill>
-          <a:blip r:embed="rId3"/>
-          <a:stretch>
-            <a:fillRect/>
-          </a:stretch>
-        </p:blipFill>
-        <p:spPr>
           <a:xfrm rot="480000">
             <a:off x="9829800" y="1920240"/>
             <a:ext cx="1874520" cy="3291840"/>
@@ -1641,11 +1866,11 @@
           <a:bodyPr wrap="square" lIns="0" tIns="0" rIns="0" bIns="0" rtlCol="0" anchor="ctr"/>
           <a:lstStyle/>
           <a:p>
-            <a:pPr marL="0" indent="0">
-              <a:buNone/>
-            </a:pPr>
-            <a:r>
-              <a:rPr lang="en-US" sz="1400" b="1" kern="0" spc="400" dirty="0">
+            <a:pPr indent="0" marL="0">
+              <a:buNone/>
+            </a:pPr>
+            <a:r>
+              <a:rPr lang="en-US" sz="1400" b="1" spc="400" kern="0" dirty="0">
                 <a:solidFill>
                   <a:srgbClr val="D9B45E"/>
                 </a:solidFill>
@@ -1680,7 +1905,7 @@
           <a:bodyPr wrap="square" lIns="0" tIns="0" rIns="0" bIns="0" rtlCol="0" anchor="ctr"/>
           <a:lstStyle/>
           <a:p>
-            <a:pPr marL="0" indent="0">
+            <a:pPr indent="0" marL="0">
               <a:lnSpc>
                 <a:spcPct val="105000"/>
               </a:lnSpc>
@@ -1695,7 +1920,27 @@
                 <a:ea typeface="Cambria" pitchFamily="34" charset="-122"/>
                 <a:cs typeface="Cambria" pitchFamily="34" charset="-120"/>
               </a:rPr>
-              <a:t>For people who believe in thinking out loud.</a:t>
+              <a:t>For people who don't believe in tarot,</a:t>
+            </a:r>
+            <a:endParaRPr lang="en-US" sz="3600" dirty="0"/>
+          </a:p>
+          <a:p>
+            <a:pPr indent="0" marL="0">
+              <a:lnSpc>
+                <a:spcPct val="105000"/>
+              </a:lnSpc>
+              <a:buNone/>
+            </a:pPr>
+            <a:r>
+              <a:rPr lang="en-US" sz="3600" b="1" dirty="0">
+                <a:solidFill>
+                  <a:srgbClr val="FFFFFF"/>
+                </a:solidFill>
+                <a:latin typeface="Cambria" pitchFamily="34" charset="0"/>
+                <a:ea typeface="Cambria" pitchFamily="34" charset="-122"/>
+                <a:cs typeface="Cambria" pitchFamily="34" charset="-120"/>
+              </a:rPr>
+              <a:t>but believe in thinking out loud.</a:t>
             </a:r>
             <a:endParaRPr lang="en-US" sz="3600" dirty="0"/>
           </a:p>
@@ -1722,7 +1967,7 @@
           <a:bodyPr wrap="square" lIns="0" tIns="0" rIns="0" bIns="0" rtlCol="0" anchor="ctr"/>
           <a:lstStyle/>
           <a:p>
-            <a:pPr marL="0" indent="0">
+            <a:pPr indent="0" marL="0">
               <a:buNone/>
             </a:pPr>
             <a:r>
@@ -1748,7 +1993,7 @@
         </p:nvSpPr>
         <p:spPr>
           <a:xfrm>
-            <a:off x="822960" y="5943600"/>
+            <a:off x="822960" y="5532120"/>
             <a:ext cx="6858000" cy="365760"/>
           </a:xfrm>
           <a:prstGeom prst="rect">
@@ -1761,13 +2006,59 @@
           <a:bodyPr wrap="square" lIns="0" tIns="0" rIns="0" bIns="0" rtlCol="0" anchor="ctr"/>
           <a:lstStyle/>
           <a:p>
-            <a:pPr marL="0" indent="0">
+            <a:pPr indent="0" marL="0">
+              <a:buNone/>
+            </a:pPr>
+            <a:r>
+              <a:rPr lang="en-US" sz="1500" b="1" u="sng" dirty="0">
+                <a:solidFill>
+                  <a:srgbClr val="D9B45E"/>
+                </a:solidFill>
+                <a:latin typeface="Calibri" pitchFamily="34" charset="0"/>
+                <a:ea typeface="Calibri" pitchFamily="34" charset="-122"/>
+                <a:cs typeface="Calibri" pitchFamily="34" charset="-120"/>
+                <a:hlinkClick r:id="rId4" invalidUrl="" action="" tgtFrame="" tooltip="" history="1" highlightClick="0" endSnd="0">
+                  <a:extLst>
+                    <a:ext uri="{A12FA001-AC4F-418D-AE19-62706E023703}">
+                      <ahyp:hlinkClr xmlns:ahyp="http://schemas.microsoft.com/office/drawing/2018/hyperlinkcolor" val="tx"/>
+                    </a:ext>
+                  </a:extLst>
+                </a:hlinkClick>
+              </a:rPr>
+              <a:t>wyc79.github.io/ai-tarot-projection</a:t>
+            </a:r>
+            <a:endParaRPr lang="en-US" sz="1500" dirty="0"/>
+          </a:p>
+        </p:txBody>
+      </p:sp>
+      <p:sp>
+        <p:nvSpPr>
+          <p:cNvPr id="9" name="Text 4"/>
+          <p:cNvSpPr txBox="1"/>
+          <p:nvPr/>
+        </p:nvSpPr>
+        <p:spPr>
+          <a:xfrm>
+            <a:off x="822960" y="5989320"/>
+            <a:ext cx="6858000" cy="365760"/>
+          </a:xfrm>
+          <a:prstGeom prst="rect">
+            <a:avLst/>
+          </a:prstGeom>
+          <a:noFill/>
+          <a:ln/>
+        </p:spPr>
+        <p:txBody>
+          <a:bodyPr wrap="square" lIns="0" tIns="0" rIns="0" bIns="0" rtlCol="0" anchor="ctr"/>
+          <a:lstStyle/>
+          <a:p>
+            <a:pPr indent="0" marL="0">
               <a:buNone/>
             </a:pPr>
             <a:r>
               <a:rPr lang="en-US" sz="1300" dirty="0">
                 <a:solidFill>
-                  <a:srgbClr val="D9B45E"/>
+                  <a:srgbClr val="A79FC4"/>
                 </a:solidFill>
                 <a:latin typeface="Calibri" pitchFamily="34" charset="0"/>
                 <a:ea typeface="Calibri" pitchFamily="34" charset="-122"/>
@@ -1795,7 +2086,6 @@
         <a:solidFill>
           <a:srgbClr val="FFFFFF"/>
         </a:solidFill>
-        <a:effectLst/>
       </p:bgPr>
     </p:bg>
     <p:spTree>
@@ -1833,11 +2123,11 @@
           <a:bodyPr wrap="square" lIns="0" tIns="0" rIns="0" bIns="0" rtlCol="0" anchor="ctr"/>
           <a:lstStyle/>
           <a:p>
-            <a:pPr marL="0" indent="0" algn="l">
-              <a:buNone/>
-            </a:pPr>
-            <a:r>
-              <a:rPr lang="en-US" sz="1300" b="1" kern="0" spc="300" dirty="0">
+            <a:pPr algn="l" indent="0" marL="0">
+              <a:buNone/>
+            </a:pPr>
+            <a:r>
+              <a:rPr lang="en-US" sz="1300" b="1" spc="300" kern="0" dirty="0">
                 <a:solidFill>
                   <a:srgbClr val="8A6C1E"/>
                 </a:solidFill>
@@ -1872,7 +2162,7 @@
           <a:bodyPr wrap="square" lIns="0" tIns="0" rIns="0" bIns="0" rtlCol="0" anchor="ctr"/>
           <a:lstStyle/>
           <a:p>
-            <a:pPr marL="0" indent="0" algn="l">
+            <a:pPr algn="l" indent="0" marL="0">
               <a:buNone/>
             </a:pPr>
             <a:r>
@@ -1916,13 +2206,6 @@
             <a:prstDash val="solid"/>
           </a:ln>
         </p:spPr>
-        <p:txBody>
-          <a:bodyPr/>
-          <a:lstStyle/>
-          <a:p>
-            <a:endParaRPr lang="en-US"/>
-          </a:p>
-        </p:txBody>
       </p:sp>
       <p:sp>
         <p:nvSpPr>
@@ -1943,24 +2226,17 @@
           </a:solidFill>
           <a:ln/>
         </p:spPr>
-        <p:txBody>
-          <a:bodyPr/>
-          <a:lstStyle/>
-          <a:p>
-            <a:endParaRPr lang="en-US"/>
-          </a:p>
-        </p:txBody>
       </p:sp>
       <p:pic>
         <p:nvPicPr>
-          <p:cNvPr id="6" name="Image 0" descr="/home/claude/tarot-deck/icons/feather-gold.png"/>
+          <p:cNvPr id="6" name="Image 0" descr="/home/claude/tarot-deck/icons/feather-gold.png">    </p:cNvPr>
           <p:cNvPicPr>
             <a:picLocks noChangeAspect="1"/>
           </p:cNvPicPr>
           <p:nvPr/>
         </p:nvPicPr>
         <p:blipFill>
-          <a:blip r:embed="rId3"/>
+          <a:blip r:embed="rId1"/>
           <a:stretch>
             <a:fillRect/>
           </a:stretch>
@@ -1996,7 +2272,7 @@
           <a:bodyPr wrap="square" lIns="0" tIns="0" rIns="0" bIns="0" rtlCol="0" anchor="ctr"/>
           <a:lstStyle/>
           <a:p>
-            <a:pPr marL="0" indent="0">
+            <a:pPr indent="0" marL="0">
               <a:buNone/>
             </a:pPr>
             <a:r>
@@ -2035,7 +2311,7 @@
           <a:bodyPr wrap="square" lIns="0" tIns="0" rIns="0" bIns="0" rtlCol="0" anchor="ctr"/>
           <a:lstStyle/>
           <a:p>
-            <a:pPr marL="0" indent="0">
+            <a:pPr indent="0" marL="0">
               <a:lnSpc>
                 <a:spcPct val="112000"/>
               </a:lnSpc>
@@ -2082,13 +2358,6 @@
             <a:prstDash val="solid"/>
           </a:ln>
         </p:spPr>
-        <p:txBody>
-          <a:bodyPr/>
-          <a:lstStyle/>
-          <a:p>
-            <a:endParaRPr lang="en-US"/>
-          </a:p>
-        </p:txBody>
       </p:sp>
       <p:sp>
         <p:nvSpPr>
@@ -2109,24 +2378,17 @@
           </a:solidFill>
           <a:ln/>
         </p:spPr>
-        <p:txBody>
-          <a:bodyPr/>
-          <a:lstStyle/>
-          <a:p>
-            <a:endParaRPr lang="en-US"/>
-          </a:p>
-        </p:txBody>
       </p:sp>
       <p:pic>
         <p:nvPicPr>
-          <p:cNvPr id="11" name="Image 1" descr="/home/claude/tarot-deck/icons/sun-gold.png"/>
+          <p:cNvPr id="11" name="Image 1" descr="/home/claude/tarot-deck/icons/sun-gold.png">    </p:cNvPr>
           <p:cNvPicPr>
             <a:picLocks noChangeAspect="1"/>
           </p:cNvPicPr>
           <p:nvPr/>
         </p:nvPicPr>
         <p:blipFill>
-          <a:blip r:embed="rId4"/>
+          <a:blip r:embed="rId2"/>
           <a:stretch>
             <a:fillRect/>
           </a:stretch>
@@ -2162,7 +2424,7 @@
           <a:bodyPr wrap="square" lIns="0" tIns="0" rIns="0" bIns="0" rtlCol="0" anchor="ctr"/>
           <a:lstStyle/>
           <a:p>
-            <a:pPr marL="0" indent="0">
+            <a:pPr indent="0" marL="0">
               <a:buNone/>
             </a:pPr>
             <a:r>
@@ -2201,7 +2463,7 @@
           <a:bodyPr wrap="square" lIns="0" tIns="0" rIns="0" bIns="0" rtlCol="0" anchor="ctr"/>
           <a:lstStyle/>
           <a:p>
-            <a:pPr marL="0" indent="0">
+            <a:pPr indent="0" marL="0">
               <a:lnSpc>
                 <a:spcPct val="112000"/>
               </a:lnSpc>
@@ -2248,13 +2510,6 @@
             <a:prstDash val="solid"/>
           </a:ln>
         </p:spPr>
-        <p:txBody>
-          <a:bodyPr/>
-          <a:lstStyle/>
-          <a:p>
-            <a:endParaRPr lang="en-US"/>
-          </a:p>
-        </p:txBody>
       </p:sp>
       <p:sp>
         <p:nvSpPr>
@@ -2275,24 +2530,17 @@
           </a:solidFill>
           <a:ln/>
         </p:spPr>
-        <p:txBody>
-          <a:bodyPr/>
-          <a:lstStyle/>
-          <a:p>
-            <a:endParaRPr lang="en-US"/>
-          </a:p>
-        </p:txBody>
       </p:sp>
       <p:pic>
         <p:nvPicPr>
-          <p:cNvPr id="16" name="Image 2" descr="/home/claude/tarot-deck/icons/user-gold.png"/>
+          <p:cNvPr id="16" name="Image 2" descr="/home/claude/tarot-deck/icons/user-gold.png">    </p:cNvPr>
           <p:cNvPicPr>
             <a:picLocks noChangeAspect="1"/>
           </p:cNvPicPr>
           <p:nvPr/>
         </p:nvPicPr>
         <p:blipFill>
-          <a:blip r:embed="rId5"/>
+          <a:blip r:embed="rId3"/>
           <a:stretch>
             <a:fillRect/>
           </a:stretch>
@@ -2328,7 +2576,7 @@
           <a:bodyPr wrap="square" lIns="0" tIns="0" rIns="0" bIns="0" rtlCol="0" anchor="ctr"/>
           <a:lstStyle/>
           <a:p>
-            <a:pPr marL="0" indent="0">
+            <a:pPr indent="0" marL="0">
               <a:buNone/>
             </a:pPr>
             <a:r>
@@ -2367,7 +2615,7 @@
           <a:bodyPr wrap="square" lIns="0" tIns="0" rIns="0" bIns="0" rtlCol="0" anchor="ctr"/>
           <a:lstStyle/>
           <a:p>
-            <a:pPr marL="0" indent="0">
+            <a:pPr indent="0" marL="0">
               <a:lnSpc>
                 <a:spcPct val="112000"/>
               </a:lnSpc>
@@ -2414,13 +2662,6 @@
             <a:prstDash val="solid"/>
           </a:ln>
         </p:spPr>
-        <p:txBody>
-          <a:bodyPr/>
-          <a:lstStyle/>
-          <a:p>
-            <a:endParaRPr lang="en-US"/>
-          </a:p>
-        </p:txBody>
       </p:sp>
       <p:sp>
         <p:nvSpPr>
@@ -2441,24 +2682,17 @@
           </a:solidFill>
           <a:ln/>
         </p:spPr>
-        <p:txBody>
-          <a:bodyPr/>
-          <a:lstStyle/>
-          <a:p>
-            <a:endParaRPr lang="en-US"/>
-          </a:p>
-        </p:txBody>
       </p:sp>
       <p:pic>
         <p:nvPicPr>
-          <p:cNvPr id="21" name="Image 3" descr="/home/claude/tarot-deck/icons/compass-gold.png"/>
+          <p:cNvPr id="21" name="Image 3" descr="/home/claude/tarot-deck/icons/compass-gold.png">    </p:cNvPr>
           <p:cNvPicPr>
             <a:picLocks noChangeAspect="1"/>
           </p:cNvPicPr>
           <p:nvPr/>
         </p:nvPicPr>
         <p:blipFill>
-          <a:blip r:embed="rId6"/>
+          <a:blip r:embed="rId4"/>
           <a:stretch>
             <a:fillRect/>
           </a:stretch>
@@ -2494,7 +2728,7 @@
           <a:bodyPr wrap="square" lIns="0" tIns="0" rIns="0" bIns="0" rtlCol="0" anchor="ctr"/>
           <a:lstStyle/>
           <a:p>
-            <a:pPr marL="0" indent="0">
+            <a:pPr indent="0" marL="0">
               <a:buNone/>
             </a:pPr>
             <a:r>
@@ -2533,7 +2767,7 @@
           <a:bodyPr wrap="square" lIns="0" tIns="0" rIns="0" bIns="0" rtlCol="0" anchor="ctr"/>
           <a:lstStyle/>
           <a:p>
-            <a:pPr marL="0" indent="0">
+            <a:pPr indent="0" marL="0">
               <a:lnSpc>
                 <a:spcPct val="112000"/>
               </a:lnSpc>
@@ -2575,7 +2809,7 @@
           <a:bodyPr wrap="square" lIns="0" tIns="0" rIns="0" bIns="0" rtlCol="0" anchor="ctr"/>
           <a:lstStyle/>
           <a:p>
-            <a:pPr marL="0" indent="0">
+            <a:pPr indent="0" marL="0">
               <a:buNone/>
             </a:pPr>
             <a:r>
@@ -2614,7 +2848,7 @@
           <a:bodyPr wrap="square" lIns="0" tIns="0" rIns="0" bIns="0" rtlCol="0" anchor="ctr"/>
           <a:lstStyle/>
           <a:p>
-            <a:pPr marL="0" indent="0" algn="r">
+            <a:pPr algn="r" indent="0" marL="0">
               <a:buNone/>
             </a:pPr>
             <a:r>
@@ -2648,7 +2882,6 @@
         <a:solidFill>
           <a:srgbClr val="231C40"/>
         </a:solidFill>
-        <a:effectLst/>
       </p:bgPr>
     </p:bg>
     <p:spTree>
@@ -2667,14 +2900,14 @@
       </p:grpSpPr>
       <p:pic>
         <p:nvPicPr>
-          <p:cNvPr id="2" name="Image 0" descr="/mnt/user-data/uploads/ai-tarot-projection/data/Cards-jpg/17-TheStar.jpg"/>
+          <p:cNvPr id="2" name="Image 0" descr="/mnt/user-data/uploads/ai-tarot-projection/data/Cards-jpg/17-TheStar.jpg">    </p:cNvPr>
           <p:cNvPicPr>
             <a:picLocks noChangeAspect="1"/>
           </p:cNvPicPr>
           <p:nvPr/>
         </p:nvPicPr>
         <p:blipFill>
-          <a:blip r:embed="rId3"/>
+          <a:blip r:embed="rId1"/>
           <a:stretch>
             <a:fillRect/>
           </a:stretch>
@@ -2710,7 +2943,7 @@
           <a:bodyPr wrap="square" lIns="0" tIns="0" rIns="0" bIns="0" rtlCol="0" anchor="ctr"/>
           <a:lstStyle/>
           <a:p>
-            <a:pPr marL="0" indent="0">
+            <a:pPr indent="0" marL="0">
               <a:lnSpc>
                 <a:spcPct val="112000"/>
               </a:lnSpc>
@@ -2730,7 +2963,7 @@
             <a:endParaRPr lang="en-US" sz="3100" dirty="0"/>
           </a:p>
           <a:p>
-            <a:pPr marL="0" indent="0">
+            <a:pPr indent="0" marL="0">
               <a:lnSpc>
                 <a:spcPct val="112000"/>
               </a:lnSpc>
@@ -2772,7 +3005,7 @@
           <a:bodyPr wrap="square" lIns="0" tIns="0" rIns="0" bIns="0" rtlCol="0" anchor="ctr"/>
           <a:lstStyle/>
           <a:p>
-            <a:pPr marL="0" indent="0">
+            <a:pPr indent="0" marL="0">
               <a:buNone/>
             </a:pPr>
             <a:r>
@@ -2811,7 +3044,7 @@
           <a:bodyPr wrap="square" lIns="0" tIns="0" rIns="0" bIns="0" rtlCol="0" anchor="ctr"/>
           <a:lstStyle/>
           <a:p>
-            <a:pPr marL="0" indent="0">
+            <a:pPr indent="0" marL="0">
               <a:lnSpc>
                 <a:spcPct val="118000"/>
               </a:lnSpc>
@@ -2831,7 +3064,7 @@
             <a:endParaRPr lang="en-US" sz="1500" dirty="0"/>
           </a:p>
           <a:p>
-            <a:pPr marL="0" indent="0">
+            <a:pPr indent="0" marL="0">
               <a:lnSpc>
                 <a:spcPct val="118000"/>
               </a:lnSpc>
@@ -2860,7 +3093,53 @@
         </p:nvSpPr>
         <p:spPr>
           <a:xfrm>
-            <a:off x="822960" y="5852160"/>
+            <a:off x="822960" y="5623560"/>
+            <a:ext cx="6858000" cy="411480"/>
+          </a:xfrm>
+          <a:prstGeom prst="rect">
+            <a:avLst/>
+          </a:prstGeom>
+          <a:noFill/>
+          <a:ln/>
+        </p:spPr>
+        <p:txBody>
+          <a:bodyPr wrap="square" lIns="0" tIns="0" rIns="0" bIns="0" rtlCol="0" anchor="ctr"/>
+          <a:lstStyle/>
+          <a:p>
+            <a:pPr indent="0" marL="0">
+              <a:buNone/>
+            </a:pPr>
+            <a:r>
+              <a:rPr lang="en-US" sz="1600" b="1" u="sng" dirty="0">
+                <a:solidFill>
+                  <a:srgbClr val="D9B45E"/>
+                </a:solidFill>
+                <a:latin typeface="Calibri" pitchFamily="34" charset="0"/>
+                <a:ea typeface="Calibri" pitchFamily="34" charset="-122"/>
+                <a:cs typeface="Calibri" pitchFamily="34" charset="-120"/>
+                <a:hlinkClick r:id="rId2" invalidUrl="" action="" tgtFrame="" tooltip="" history="1" highlightClick="0" endSnd="0">
+                  <a:extLst>
+                    <a:ext uri="{A12FA001-AC4F-418D-AE19-62706E023703}">
+                      <ahyp:hlinkClr xmlns:ahyp="http://schemas.microsoft.com/office/drawing/2018/hyperlinkcolor" val="tx"/>
+                    </a:ext>
+                  </a:extLst>
+                </a:hlinkClick>
+              </a:rPr>
+              <a:t>Try it:  wyc79.github.io/ai-tarot-projection</a:t>
+            </a:r>
+            <a:endParaRPr lang="en-US" sz="1600" dirty="0"/>
+          </a:p>
+        </p:txBody>
+      </p:sp>
+      <p:sp>
+        <p:nvSpPr>
+          <p:cNvPr id="7" name="Text 4"/>
+          <p:cNvSpPr txBox="1"/>
+          <p:nvPr/>
+        </p:nvSpPr>
+        <p:spPr>
+          <a:xfrm>
+            <a:off x="822960" y="6126480"/>
             <a:ext cx="3657600" cy="365760"/>
           </a:xfrm>
           <a:prstGeom prst="rect">
@@ -2873,11 +3152,11 @@
           <a:bodyPr wrap="square" lIns="0" tIns="0" rIns="0" bIns="0" rtlCol="0" anchor="ctr"/>
           <a:lstStyle/>
           <a:p>
-            <a:pPr marL="0" indent="0">
-              <a:buNone/>
-            </a:pPr>
-            <a:r>
-              <a:rPr lang="en-US" sz="1300" b="1" kern="0" spc="300" dirty="0">
+            <a:pPr indent="0" marL="0">
+              <a:buNone/>
+            </a:pPr>
+            <a:r>
+              <a:rPr lang="en-US" sz="1300" b="1" spc="300" kern="0" dirty="0">
                 <a:solidFill>
                   <a:srgbClr val="D9B45E"/>
                 </a:solidFill>
@@ -2907,7 +3186,6 @@
         <a:solidFill>
           <a:srgbClr val="FFFFFF"/>
         </a:solidFill>
-        <a:effectLst/>
       </p:bgPr>
     </p:bg>
     <p:spTree>
@@ -2945,11 +3223,11 @@
           <a:bodyPr wrap="square" lIns="0" tIns="0" rIns="0" bIns="0" rtlCol="0" anchor="ctr"/>
           <a:lstStyle/>
           <a:p>
-            <a:pPr marL="0" indent="0" algn="l">
-              <a:buNone/>
-            </a:pPr>
-            <a:r>
-              <a:rPr lang="en-US" sz="1300" b="1" kern="0" spc="300" dirty="0">
+            <a:pPr algn="l" indent="0" marL="0">
+              <a:buNone/>
+            </a:pPr>
+            <a:r>
+              <a:rPr lang="en-US" sz="1300" b="1" spc="300" kern="0" dirty="0">
                 <a:solidFill>
                   <a:srgbClr val="8A6C1E"/>
                 </a:solidFill>
@@ -2984,7 +3262,7 @@
           <a:bodyPr wrap="square" lIns="0" tIns="0" rIns="0" bIns="0" rtlCol="0" anchor="ctr"/>
           <a:lstStyle/>
           <a:p>
-            <a:pPr marL="0" indent="0" algn="l">
+            <a:pPr algn="l" indent="0" marL="0">
               <a:buNone/>
             </a:pPr>
             <a:r>
@@ -3023,7 +3301,7 @@
           <a:bodyPr wrap="square" lIns="0" tIns="0" rIns="0" bIns="0" rtlCol="0" anchor="ctr"/>
           <a:lstStyle/>
           <a:p>
-            <a:pPr marL="0" indent="0">
+            <a:pPr indent="0" marL="0">
               <a:lnSpc>
                 <a:spcPct val="115000"/>
               </a:lnSpc>
@@ -3063,17 +3341,222 @@
           </a:solidFill>
           <a:ln/>
         </p:spPr>
-        <p:txBody>
-          <a:bodyPr/>
-          <a:lstStyle/>
-          <a:p>
-            <a:endParaRPr lang="en-US"/>
-          </a:p>
-        </p:txBody>
       </p:sp>
       <p:pic>
         <p:nvPicPr>
-          <p:cNvPr id="6" name="Image 0" descr="/home/claude/tarot-deck/icons/eye-gold.png"/>
+          <p:cNvPr id="6" name="Image 0" descr="/home/claude/tarot-deck/icons/eye-gold.png">    </p:cNvPr>
+          <p:cNvPicPr>
+            <a:picLocks noChangeAspect="1"/>
+          </p:cNvPicPr>
+          <p:nvPr/>
+        </p:nvPicPr>
+        <p:blipFill>
+          <a:blip r:embed="rId1"/>
+          <a:stretch>
+            <a:fillRect/>
+          </a:stretch>
+        </p:blipFill>
+        <p:spPr>
+          <a:xfrm>
+            <a:off x="768096" y="3209544"/>
+            <a:ext cx="256032" cy="256032"/>
+          </a:xfrm>
+          <a:prstGeom prst="rect">
+            <a:avLst/>
+          </a:prstGeom>
+        </p:spPr>
+      </p:pic>
+      <p:sp>
+        <p:nvSpPr>
+          <p:cNvPr id="7" name="Text 4"/>
+          <p:cNvSpPr txBox="1"/>
+          <p:nvPr/>
+        </p:nvSpPr>
+        <p:spPr>
+          <a:xfrm>
+            <a:off x="1371600" y="3063240"/>
+            <a:ext cx="6309360" cy="914400"/>
+          </a:xfrm>
+          <a:prstGeom prst="rect">
+            <a:avLst/>
+          </a:prstGeom>
+          <a:noFill/>
+          <a:ln/>
+        </p:spPr>
+        <p:txBody>
+          <a:bodyPr wrap="square" lIns="0" tIns="0" rIns="0" bIns="0" rtlCol="0" anchor="t"/>
+          <a:lstStyle/>
+          <a:p>
+            <a:pPr algn="l" indent="0" marL="0">
+              <a:lnSpc>
+                <a:spcPct val="110000"/>
+              </a:lnSpc>
+              <a:buNone/>
+            </a:pPr>
+            <a:r>
+              <a:rPr lang="en-US" sz="1700" b="1" dirty="0">
+                <a:solidFill>
+                  <a:srgbClr val="2B2545"/>
+                </a:solidFill>
+                <a:latin typeface="Calibri" pitchFamily="34" charset="0"/>
+                <a:ea typeface="Calibri" pitchFamily="34" charset="-122"/>
+                <a:cs typeface="Calibri" pitchFamily="34" charset="-120"/>
+              </a:rPr>
+              <a:t>Projection, not prediction</a:t>
+            </a:r>
+            <a:endParaRPr lang="en-US" sz="1700" dirty="0"/>
+          </a:p>
+          <a:p>
+            <a:pPr algn="l" indent="0" marL="0">
+              <a:lnSpc>
+                <a:spcPct val="110000"/>
+              </a:lnSpc>
+              <a:buNone/>
+            </a:pPr>
+            <a:r>
+              <a:rPr lang="en-US" sz="1400" dirty="0">
+                <a:solidFill>
+                  <a:srgbClr val="5E5678"/>
+                </a:solidFill>
+                <a:latin typeface="Calibri" pitchFamily="34" charset="0"/>
+                <a:ea typeface="Calibri" pitchFamily="34" charset="-122"/>
+                <a:cs typeface="Calibri" pitchFamily="34" charset="-120"/>
+              </a:rPr>
+              <a:t>A flip shows the card's name, never a caption.</a:t>
+            </a:r>
+            <a:endParaRPr lang="en-US" sz="1700" dirty="0"/>
+          </a:p>
+        </p:txBody>
+      </p:sp>
+      <p:sp>
+        <p:nvSpPr>
+          <p:cNvPr id="8" name="Shape 5"/>
+          <p:cNvSpPr/>
+          <p:nvPr/>
+        </p:nvSpPr>
+        <p:spPr>
+          <a:xfrm>
+            <a:off x="640080" y="4160520"/>
+            <a:ext cx="512064" cy="512064"/>
+          </a:xfrm>
+          <a:prstGeom prst="ellipse">
+            <a:avLst/>
+          </a:prstGeom>
+          <a:solidFill>
+            <a:srgbClr val="231C40"/>
+          </a:solidFill>
+          <a:ln/>
+        </p:spPr>
+      </p:sp>
+      <p:pic>
+        <p:nvPicPr>
+          <p:cNvPr id="9" name="Image 1" descr="/home/claude/tarot-deck/icons/message-gold.png">    </p:cNvPr>
+          <p:cNvPicPr>
+            <a:picLocks noChangeAspect="1"/>
+          </p:cNvPicPr>
+          <p:nvPr/>
+        </p:nvPicPr>
+        <p:blipFill>
+          <a:blip r:embed="rId2"/>
+          <a:stretch>
+            <a:fillRect/>
+          </a:stretch>
+        </p:blipFill>
+        <p:spPr>
+          <a:xfrm>
+            <a:off x="768096" y="4288536"/>
+            <a:ext cx="256032" cy="256032"/>
+          </a:xfrm>
+          <a:prstGeom prst="rect">
+            <a:avLst/>
+          </a:prstGeom>
+        </p:spPr>
+      </p:pic>
+      <p:sp>
+        <p:nvSpPr>
+          <p:cNvPr id="10" name="Text 6"/>
+          <p:cNvSpPr txBox="1"/>
+          <p:nvPr/>
+        </p:nvSpPr>
+        <p:spPr>
+          <a:xfrm>
+            <a:off x="1371600" y="4142232"/>
+            <a:ext cx="6309360" cy="914400"/>
+          </a:xfrm>
+          <a:prstGeom prst="rect">
+            <a:avLst/>
+          </a:prstGeom>
+          <a:noFill/>
+          <a:ln/>
+        </p:spPr>
+        <p:txBody>
+          <a:bodyPr wrap="square" lIns="0" tIns="0" rIns="0" bIns="0" rtlCol="0" anchor="t"/>
+          <a:lstStyle/>
+          <a:p>
+            <a:pPr algn="l" indent="0" marL="0">
+              <a:lnSpc>
+                <a:spcPct val="110000"/>
+              </a:lnSpc>
+              <a:buNone/>
+            </a:pPr>
+            <a:r>
+              <a:rPr lang="en-US" sz="1700" b="1" dirty="0">
+                <a:solidFill>
+                  <a:srgbClr val="2B2545"/>
+                </a:solidFill>
+                <a:latin typeface="Calibri" pitchFamily="34" charset="0"/>
+                <a:ea typeface="Calibri" pitchFamily="34" charset="-122"/>
+                <a:cs typeface="Calibri" pitchFamily="34" charset="-120"/>
+              </a:rPr>
+              <a:t>You always speak first</a:t>
+            </a:r>
+            <a:endParaRPr lang="en-US" sz="1700" dirty="0"/>
+          </a:p>
+          <a:p>
+            <a:pPr algn="l" indent="0" marL="0">
+              <a:lnSpc>
+                <a:spcPct val="110000"/>
+              </a:lnSpc>
+              <a:buNone/>
+            </a:pPr>
+            <a:r>
+              <a:rPr lang="en-US" sz="1400" dirty="0">
+                <a:solidFill>
+                  <a:srgbClr val="5E5678"/>
+                </a:solidFill>
+                <a:latin typeface="Calibri" pitchFamily="34" charset="0"/>
+                <a:ea typeface="Calibri" pitchFamily="34" charset="-122"/>
+                <a:cs typeface="Calibri" pitchFamily="34" charset="-120"/>
+              </a:rPr>
+              <a:t>What you see in the picture becomes the conversation.</a:t>
+            </a:r>
+            <a:endParaRPr lang="en-US" sz="1700" dirty="0"/>
+          </a:p>
+        </p:txBody>
+      </p:sp>
+      <p:sp>
+        <p:nvSpPr>
+          <p:cNvPr id="11" name="Shape 7"/>
+          <p:cNvSpPr/>
+          <p:nvPr/>
+        </p:nvSpPr>
+        <p:spPr>
+          <a:xfrm>
+            <a:off x="640080" y="5239512"/>
+            <a:ext cx="512064" cy="512064"/>
+          </a:xfrm>
+          <a:prstGeom prst="ellipse">
+            <a:avLst/>
+          </a:prstGeom>
+          <a:solidFill>
+            <a:srgbClr val="231C40"/>
+          </a:solidFill>
+          <a:ln/>
+        </p:spPr>
+      </p:sp>
+      <p:pic>
+        <p:nvPicPr>
+          <p:cNvPr id="12" name="Image 2" descr="/home/claude/tarot-deck/icons/layers-gold.png">    </p:cNvPr>
           <p:cNvPicPr>
             <a:picLocks noChangeAspect="1"/>
           </p:cNvPicPr>
@@ -3087,7 +3570,7 @@
         </p:blipFill>
         <p:spPr>
           <a:xfrm>
-            <a:off x="768096" y="3209544"/>
+            <a:off x="768096" y="5367528"/>
             <a:ext cx="256032" cy="256032"/>
           </a:xfrm>
           <a:prstGeom prst="rect">
@@ -3097,13 +3580,13 @@
       </p:pic>
       <p:sp>
         <p:nvSpPr>
-          <p:cNvPr id="7" name="Text 4"/>
-          <p:cNvSpPr txBox="1"/>
-          <p:nvPr/>
-        </p:nvSpPr>
-        <p:spPr>
-          <a:xfrm>
-            <a:off x="1371600" y="3063240"/>
+          <p:cNvPr id="13" name="Text 8"/>
+          <p:cNvSpPr txBox="1"/>
+          <p:nvPr/>
+        </p:nvSpPr>
+        <p:spPr>
+          <a:xfrm>
+            <a:off x="1371600" y="5221224"/>
             <a:ext cx="6309360" cy="914400"/>
           </a:xfrm>
           <a:prstGeom prst="rect">
@@ -3116,7 +3599,7 @@
           <a:bodyPr wrap="square" lIns="0" tIns="0" rIns="0" bIns="0" rtlCol="0" anchor="t"/>
           <a:lstStyle/>
           <a:p>
-            <a:pPr marL="0" indent="0" algn="l">
+            <a:pPr algn="l" indent="0" marL="0">
               <a:lnSpc>
                 <a:spcPct val="110000"/>
               </a:lnSpc>
@@ -3131,12 +3614,12 @@
                 <a:ea typeface="Calibri" pitchFamily="34" charset="-122"/>
                 <a:cs typeface="Calibri" pitchFamily="34" charset="-120"/>
               </a:rPr>
-              <a:t>Projection, not prediction</a:t>
+              <a:t>The card is the third object in the room</a:t>
             </a:r>
             <a:endParaRPr lang="en-US" sz="1700" dirty="0"/>
           </a:p>
           <a:p>
-            <a:pPr marL="0" indent="0" algn="l">
+            <a:pPr algn="l" indent="0" marL="0">
               <a:lnSpc>
                 <a:spcPct val="110000"/>
               </a:lnSpc>
@@ -3151,42 +3634,15 @@
                 <a:ea typeface="Calibri" pitchFamily="34" charset="-122"/>
                 <a:cs typeface="Calibri" pitchFamily="34" charset="-120"/>
               </a:rPr>
-              <a:t>A flip shows the card's name, never a caption.</a:t>
+              <a:t>Pointing at a picture beats “I've been a bit off lately.”</a:t>
             </a:r>
             <a:endParaRPr lang="en-US" sz="1700" dirty="0"/>
-          </a:p>
-        </p:txBody>
-      </p:sp>
-      <p:sp>
-        <p:nvSpPr>
-          <p:cNvPr id="8" name="Shape 5"/>
-          <p:cNvSpPr/>
-          <p:nvPr/>
-        </p:nvSpPr>
-        <p:spPr>
-          <a:xfrm>
-            <a:off x="640080" y="4160520"/>
-            <a:ext cx="512064" cy="512064"/>
-          </a:xfrm>
-          <a:prstGeom prst="ellipse">
-            <a:avLst/>
-          </a:prstGeom>
-          <a:solidFill>
-            <a:srgbClr val="231C40"/>
-          </a:solidFill>
-          <a:ln/>
-        </p:spPr>
-        <p:txBody>
-          <a:bodyPr/>
-          <a:lstStyle/>
-          <a:p>
-            <a:endParaRPr lang="en-US"/>
           </a:p>
         </p:txBody>
       </p:sp>
       <p:pic>
         <p:nvPicPr>
-          <p:cNvPr id="9" name="Image 1" descr="/home/claude/tarot-deck/icons/message-gold.png"/>
+          <p:cNvPr id="14" name="Image 3" descr="/mnt/user-data/uploads/ai-tarot-projection/data/Cards-jpg/18-TheMoon.jpg">    </p:cNvPr>
           <p:cNvPicPr>
             <a:picLocks noChangeAspect="1"/>
           </p:cNvPicPr>
@@ -3200,205 +3656,6 @@
         </p:blipFill>
         <p:spPr>
           <a:xfrm>
-            <a:off x="768096" y="4288536"/>
-            <a:ext cx="256032" cy="256032"/>
-          </a:xfrm>
-          <a:prstGeom prst="rect">
-            <a:avLst/>
-          </a:prstGeom>
-        </p:spPr>
-      </p:pic>
-      <p:sp>
-        <p:nvSpPr>
-          <p:cNvPr id="10" name="Text 6"/>
-          <p:cNvSpPr txBox="1"/>
-          <p:nvPr/>
-        </p:nvSpPr>
-        <p:spPr>
-          <a:xfrm>
-            <a:off x="1371600" y="4142232"/>
-            <a:ext cx="6309360" cy="914400"/>
-          </a:xfrm>
-          <a:prstGeom prst="rect">
-            <a:avLst/>
-          </a:prstGeom>
-          <a:noFill/>
-          <a:ln/>
-        </p:spPr>
-        <p:txBody>
-          <a:bodyPr wrap="square" lIns="0" tIns="0" rIns="0" bIns="0" rtlCol="0" anchor="t"/>
-          <a:lstStyle/>
-          <a:p>
-            <a:pPr marL="0" indent="0" algn="l">
-              <a:lnSpc>
-                <a:spcPct val="110000"/>
-              </a:lnSpc>
-              <a:buNone/>
-            </a:pPr>
-            <a:r>
-              <a:rPr lang="en-US" sz="1700" b="1" dirty="0">
-                <a:solidFill>
-                  <a:srgbClr val="2B2545"/>
-                </a:solidFill>
-                <a:latin typeface="Calibri" pitchFamily="34" charset="0"/>
-                <a:ea typeface="Calibri" pitchFamily="34" charset="-122"/>
-                <a:cs typeface="Calibri" pitchFamily="34" charset="-120"/>
-              </a:rPr>
-              <a:t>You always speak first</a:t>
-            </a:r>
-            <a:endParaRPr lang="en-US" sz="1700" dirty="0"/>
-          </a:p>
-          <a:p>
-            <a:pPr marL="0" indent="0" algn="l">
-              <a:lnSpc>
-                <a:spcPct val="110000"/>
-              </a:lnSpc>
-              <a:buNone/>
-            </a:pPr>
-            <a:r>
-              <a:rPr lang="en-US" sz="1400" dirty="0">
-                <a:solidFill>
-                  <a:srgbClr val="5E5678"/>
-                </a:solidFill>
-                <a:latin typeface="Calibri" pitchFamily="34" charset="0"/>
-                <a:ea typeface="Calibri" pitchFamily="34" charset="-122"/>
-                <a:cs typeface="Calibri" pitchFamily="34" charset="-120"/>
-              </a:rPr>
-              <a:t>What you see in the picture becomes the conversation.</a:t>
-            </a:r>
-            <a:endParaRPr lang="en-US" sz="1700" dirty="0"/>
-          </a:p>
-        </p:txBody>
-      </p:sp>
-      <p:sp>
-        <p:nvSpPr>
-          <p:cNvPr id="11" name="Shape 7"/>
-          <p:cNvSpPr/>
-          <p:nvPr/>
-        </p:nvSpPr>
-        <p:spPr>
-          <a:xfrm>
-            <a:off x="640080" y="5239512"/>
-            <a:ext cx="512064" cy="512064"/>
-          </a:xfrm>
-          <a:prstGeom prst="ellipse">
-            <a:avLst/>
-          </a:prstGeom>
-          <a:solidFill>
-            <a:srgbClr val="231C40"/>
-          </a:solidFill>
-          <a:ln/>
-        </p:spPr>
-        <p:txBody>
-          <a:bodyPr/>
-          <a:lstStyle/>
-          <a:p>
-            <a:endParaRPr lang="en-US"/>
-          </a:p>
-        </p:txBody>
-      </p:sp>
-      <p:pic>
-        <p:nvPicPr>
-          <p:cNvPr id="12" name="Image 2" descr="/home/claude/tarot-deck/icons/layers-gold.png"/>
-          <p:cNvPicPr>
-            <a:picLocks noChangeAspect="1"/>
-          </p:cNvPicPr>
-          <p:nvPr/>
-        </p:nvPicPr>
-        <p:blipFill>
-          <a:blip r:embed="rId5"/>
-          <a:stretch>
-            <a:fillRect/>
-          </a:stretch>
-        </p:blipFill>
-        <p:spPr>
-          <a:xfrm>
-            <a:off x="768096" y="5367528"/>
-            <a:ext cx="256032" cy="256032"/>
-          </a:xfrm>
-          <a:prstGeom prst="rect">
-            <a:avLst/>
-          </a:prstGeom>
-        </p:spPr>
-      </p:pic>
-      <p:sp>
-        <p:nvSpPr>
-          <p:cNvPr id="13" name="Text 8"/>
-          <p:cNvSpPr txBox="1"/>
-          <p:nvPr/>
-        </p:nvSpPr>
-        <p:spPr>
-          <a:xfrm>
-            <a:off x="1371600" y="5221224"/>
-            <a:ext cx="6309360" cy="914400"/>
-          </a:xfrm>
-          <a:prstGeom prst="rect">
-            <a:avLst/>
-          </a:prstGeom>
-          <a:noFill/>
-          <a:ln/>
-        </p:spPr>
-        <p:txBody>
-          <a:bodyPr wrap="square" lIns="0" tIns="0" rIns="0" bIns="0" rtlCol="0" anchor="t"/>
-          <a:lstStyle/>
-          <a:p>
-            <a:pPr marL="0" indent="0" algn="l">
-              <a:lnSpc>
-                <a:spcPct val="110000"/>
-              </a:lnSpc>
-              <a:buNone/>
-            </a:pPr>
-            <a:r>
-              <a:rPr lang="en-US" sz="1700" b="1" dirty="0">
-                <a:solidFill>
-                  <a:srgbClr val="2B2545"/>
-                </a:solidFill>
-                <a:latin typeface="Calibri" pitchFamily="34" charset="0"/>
-                <a:ea typeface="Calibri" pitchFamily="34" charset="-122"/>
-                <a:cs typeface="Calibri" pitchFamily="34" charset="-120"/>
-              </a:rPr>
-              <a:t>The card is the third object in the room</a:t>
-            </a:r>
-            <a:endParaRPr lang="en-US" sz="1700" dirty="0"/>
-          </a:p>
-          <a:p>
-            <a:pPr marL="0" indent="0" algn="l">
-              <a:lnSpc>
-                <a:spcPct val="110000"/>
-              </a:lnSpc>
-              <a:buNone/>
-            </a:pPr>
-            <a:r>
-              <a:rPr lang="en-US" sz="1400" dirty="0">
-                <a:solidFill>
-                  <a:srgbClr val="5E5678"/>
-                </a:solidFill>
-                <a:latin typeface="Calibri" pitchFamily="34" charset="0"/>
-                <a:ea typeface="Calibri" pitchFamily="34" charset="-122"/>
-                <a:cs typeface="Calibri" pitchFamily="34" charset="-120"/>
-              </a:rPr>
-              <a:t>Pointing at a picture beats “I've been a bit off lately.”</a:t>
-            </a:r>
-            <a:endParaRPr lang="en-US" sz="1700" dirty="0"/>
-          </a:p>
-        </p:txBody>
-      </p:sp>
-      <p:pic>
-        <p:nvPicPr>
-          <p:cNvPr id="14" name="Image 3" descr="/mnt/user-data/uploads/ai-tarot-projection/data/Cards-jpg/18-TheMoon.jpg"/>
-          <p:cNvPicPr>
-            <a:picLocks noChangeAspect="1"/>
-          </p:cNvPicPr>
-          <p:nvPr/>
-        </p:nvPicPr>
-        <p:blipFill>
-          <a:blip r:embed="rId6"/>
-          <a:stretch>
-            <a:fillRect/>
-          </a:stretch>
-        </p:blipFill>
-        <p:spPr>
-          <a:xfrm>
             <a:off x="8549640" y="1600200"/>
             <a:ext cx="2377440" cy="4178808"/>
           </a:xfrm>
@@ -3428,7 +3685,7 @@
           <a:bodyPr wrap="square" lIns="0" tIns="0" rIns="0" bIns="0" rtlCol="0" anchor="ctr"/>
           <a:lstStyle/>
           <a:p>
-            <a:pPr marL="0" indent="0" algn="ctr">
+            <a:pPr algn="ctr" indent="0" marL="0">
               <a:buNone/>
             </a:pPr>
             <a:r>
@@ -3467,7 +3724,7 @@
           <a:bodyPr wrap="square" lIns="0" tIns="0" rIns="0" bIns="0" rtlCol="0" anchor="ctr"/>
           <a:lstStyle/>
           <a:p>
-            <a:pPr marL="0" indent="0" algn="r">
+            <a:pPr algn="r" indent="0" marL="0">
               <a:buNone/>
             </a:pPr>
             <a:r>
@@ -3501,7 +3758,6 @@
         <a:solidFill>
           <a:srgbClr val="FFFFFF"/>
         </a:solidFill>
-        <a:effectLst/>
       </p:bgPr>
     </p:bg>
     <p:spTree>
@@ -3539,11 +3795,11 @@
           <a:bodyPr wrap="square" lIns="0" tIns="0" rIns="0" bIns="0" rtlCol="0" anchor="ctr"/>
           <a:lstStyle/>
           <a:p>
-            <a:pPr marL="0" indent="0" algn="l">
-              <a:buNone/>
-            </a:pPr>
-            <a:r>
-              <a:rPr lang="en-US" sz="1300" b="1" kern="0" spc="300" dirty="0">
+            <a:pPr algn="l" indent="0" marL="0">
+              <a:buNone/>
+            </a:pPr>
+            <a:r>
+              <a:rPr lang="en-US" sz="1300" b="1" spc="300" kern="0" dirty="0">
                 <a:solidFill>
                   <a:srgbClr val="8A6C1E"/>
                 </a:solidFill>
@@ -3578,7 +3834,7 @@
           <a:bodyPr wrap="square" lIns="0" tIns="0" rIns="0" bIns="0" rtlCol="0" anchor="ctr"/>
           <a:lstStyle/>
           <a:p>
-            <a:pPr marL="0" indent="0" algn="l">
+            <a:pPr algn="l" indent="0" marL="0">
               <a:buNone/>
             </a:pPr>
             <a:r>
@@ -3622,13 +3878,6 @@
             <a:prstDash val="solid"/>
           </a:ln>
         </p:spPr>
-        <p:txBody>
-          <a:bodyPr/>
-          <a:lstStyle/>
-          <a:p>
-            <a:endParaRPr lang="en-US"/>
-          </a:p>
-        </p:txBody>
       </p:sp>
       <p:sp>
         <p:nvSpPr>
@@ -3651,7 +3900,7 @@
           <a:bodyPr wrap="square" lIns="0" tIns="0" rIns="0" bIns="0" rtlCol="0" anchor="ctr"/>
           <a:lstStyle/>
           <a:p>
-            <a:pPr marL="0" indent="0" algn="ctr">
+            <a:pPr algn="ctr" indent="0" marL="0">
               <a:buNone/>
             </a:pPr>
             <a:r>
@@ -3690,7 +3939,7 @@
           <a:bodyPr wrap="square" lIns="0" tIns="0" rIns="0" bIns="0" rtlCol="0" anchor="ctr"/>
           <a:lstStyle/>
           <a:p>
-            <a:pPr marL="0" indent="0" algn="ctr">
+            <a:pPr algn="ctr" indent="0" marL="0">
               <a:lnSpc>
                 <a:spcPct val="115000"/>
               </a:lnSpc>
@@ -3732,7 +3981,7 @@
           <a:bodyPr wrap="square" lIns="0" tIns="0" rIns="0" bIns="0" rtlCol="0" anchor="ctr"/>
           <a:lstStyle/>
           <a:p>
-            <a:pPr marL="0" indent="0" algn="ctr">
+            <a:pPr algn="ctr" indent="0" marL="0">
               <a:buNone/>
             </a:pPr>
             <a:r>
@@ -3776,24 +4025,17 @@
             <a:prstDash val="solid"/>
           </a:ln>
         </p:spPr>
-        <p:txBody>
-          <a:bodyPr/>
-          <a:lstStyle/>
-          <a:p>
-            <a:endParaRPr lang="en-US"/>
-          </a:p>
-        </p:txBody>
       </p:sp>
       <p:pic>
         <p:nvPicPr>
-          <p:cNvPr id="9" name="Image 0" descr="/home/claude/tarot-deck/icons/book-gold.png"/>
+          <p:cNvPr id="9" name="Image 0" descr="/home/claude/tarot-deck/icons/book-gold.png">    </p:cNvPr>
           <p:cNvPicPr>
             <a:picLocks noChangeAspect="1"/>
           </p:cNvPicPr>
           <p:nvPr/>
         </p:nvPicPr>
         <p:blipFill>
-          <a:blip r:embed="rId3"/>
+          <a:blip r:embed="rId1"/>
           <a:stretch>
             <a:fillRect/>
           </a:stretch>
@@ -3829,7 +4071,7 @@
           <a:bodyPr wrap="square" lIns="0" tIns="0" rIns="0" bIns="0" rtlCol="0" anchor="ctr"/>
           <a:lstStyle/>
           <a:p>
-            <a:pPr marL="0" indent="0">
+            <a:pPr indent="0" marL="0">
               <a:buNone/>
             </a:pPr>
             <a:r>
@@ -3868,7 +4110,7 @@
           <a:bodyPr wrap="square" lIns="0" tIns="0" rIns="0" bIns="0" rtlCol="0" anchor="ctr"/>
           <a:lstStyle/>
           <a:p>
-            <a:pPr marL="0" indent="0">
+            <a:pPr indent="0" marL="0">
               <a:lnSpc>
                 <a:spcPct val="112000"/>
               </a:lnSpc>
@@ -3915,24 +4157,17 @@
             <a:prstDash val="solid"/>
           </a:ln>
         </p:spPr>
-        <p:txBody>
-          <a:bodyPr/>
-          <a:lstStyle/>
-          <a:p>
-            <a:endParaRPr lang="en-US"/>
-          </a:p>
-        </p:txBody>
       </p:sp>
       <p:pic>
         <p:nvPicPr>
-          <p:cNvPr id="13" name="Image 1" descr="/home/claude/tarot-deck/icons/book-gold.png"/>
+          <p:cNvPr id="13" name="Image 1" descr="/home/claude/tarot-deck/icons/book-gold.png">    </p:cNvPr>
           <p:cNvPicPr>
             <a:picLocks noChangeAspect="1"/>
           </p:cNvPicPr>
           <p:nvPr/>
         </p:nvPicPr>
         <p:blipFill>
-          <a:blip r:embed="rId3"/>
+          <a:blip r:embed="rId2"/>
           <a:stretch>
             <a:fillRect/>
           </a:stretch>
@@ -3968,7 +4203,7 @@
           <a:bodyPr wrap="square" lIns="0" tIns="0" rIns="0" bIns="0" rtlCol="0" anchor="ctr"/>
           <a:lstStyle/>
           <a:p>
-            <a:pPr marL="0" indent="0">
+            <a:pPr indent="0" marL="0">
               <a:buNone/>
             </a:pPr>
             <a:r>
@@ -4007,7 +4242,7 @@
           <a:bodyPr wrap="square" lIns="0" tIns="0" rIns="0" bIns="0" rtlCol="0" anchor="ctr"/>
           <a:lstStyle/>
           <a:p>
-            <a:pPr marL="0" indent="0">
+            <a:pPr indent="0" marL="0">
               <a:lnSpc>
                 <a:spcPct val="112000"/>
               </a:lnSpc>
@@ -4054,17 +4289,10 @@
             <a:prstDash val="solid"/>
           </a:ln>
         </p:spPr>
-        <p:txBody>
-          <a:bodyPr/>
-          <a:lstStyle/>
-          <a:p>
-            <a:endParaRPr lang="en-US"/>
-          </a:p>
-        </p:txBody>
       </p:sp>
       <p:pic>
         <p:nvPicPr>
-          <p:cNvPr id="17" name="Image 2" descr="/home/claude/tarot-deck/icons/book-gold.png"/>
+          <p:cNvPr id="17" name="Image 2" descr="/home/claude/tarot-deck/icons/book-gold.png">    </p:cNvPr>
           <p:cNvPicPr>
             <a:picLocks noChangeAspect="1"/>
           </p:cNvPicPr>
@@ -4107,7 +4335,7 @@
           <a:bodyPr wrap="square" lIns="0" tIns="0" rIns="0" bIns="0" rtlCol="0" anchor="ctr"/>
           <a:lstStyle/>
           <a:p>
-            <a:pPr marL="0" indent="0">
+            <a:pPr indent="0" marL="0">
               <a:buNone/>
             </a:pPr>
             <a:r>
@@ -4146,7 +4374,7 @@
           <a:bodyPr wrap="square" lIns="0" tIns="0" rIns="0" bIns="0" rtlCol="0" anchor="ctr"/>
           <a:lstStyle/>
           <a:p>
-            <a:pPr marL="0" indent="0">
+            <a:pPr indent="0" marL="0">
               <a:lnSpc>
                 <a:spcPct val="112000"/>
               </a:lnSpc>
@@ -4193,24 +4421,17 @@
             <a:prstDash val="solid"/>
           </a:ln>
         </p:spPr>
-        <p:txBody>
-          <a:bodyPr/>
-          <a:lstStyle/>
-          <a:p>
-            <a:endParaRPr lang="en-US"/>
-          </a:p>
-        </p:txBody>
       </p:sp>
       <p:pic>
         <p:nvPicPr>
-          <p:cNvPr id="21" name="Image 3" descr="/home/claude/tarot-deck/icons/book-gold.png"/>
+          <p:cNvPr id="21" name="Image 3" descr="/home/claude/tarot-deck/icons/book-gold.png">    </p:cNvPr>
           <p:cNvPicPr>
             <a:picLocks noChangeAspect="1"/>
           </p:cNvPicPr>
           <p:nvPr/>
         </p:nvPicPr>
         <p:blipFill>
-          <a:blip r:embed="rId3"/>
+          <a:blip r:embed="rId4"/>
           <a:stretch>
             <a:fillRect/>
           </a:stretch>
@@ -4246,7 +4467,7 @@
           <a:bodyPr wrap="square" lIns="0" tIns="0" rIns="0" bIns="0" rtlCol="0" anchor="ctr"/>
           <a:lstStyle/>
           <a:p>
-            <a:pPr marL="0" indent="0">
+            <a:pPr indent="0" marL="0">
               <a:buNone/>
             </a:pPr>
             <a:r>
@@ -4285,7 +4506,7 @@
           <a:bodyPr wrap="square" lIns="0" tIns="0" rIns="0" bIns="0" rtlCol="0" anchor="ctr"/>
           <a:lstStyle/>
           <a:p>
-            <a:pPr marL="0" indent="0">
+            <a:pPr indent="0" marL="0">
               <a:lnSpc>
                 <a:spcPct val="112000"/>
               </a:lnSpc>
@@ -4327,7 +4548,7 @@
           <a:bodyPr wrap="square" lIns="0" tIns="0" rIns="0" bIns="0" rtlCol="0" anchor="ctr"/>
           <a:lstStyle/>
           <a:p>
-            <a:pPr marL="0" indent="0">
+            <a:pPr indent="0" marL="0">
               <a:buNone/>
             </a:pPr>
             <a:r>
@@ -4366,7 +4587,7 @@
           <a:bodyPr wrap="square" lIns="0" tIns="0" rIns="0" bIns="0" rtlCol="0" anchor="ctr"/>
           <a:lstStyle/>
           <a:p>
-            <a:pPr marL="0" indent="0" algn="r">
+            <a:pPr algn="r" indent="0" marL="0">
               <a:buNone/>
             </a:pPr>
             <a:r>
@@ -4400,7 +4621,6 @@
         <a:solidFill>
           <a:srgbClr val="FFFFFF"/>
         </a:solidFill>
-        <a:effectLst/>
       </p:bgPr>
     </p:bg>
     <p:spTree>
@@ -4438,11 +4658,11 @@
           <a:bodyPr wrap="square" lIns="0" tIns="0" rIns="0" bIns="0" rtlCol="0" anchor="ctr"/>
           <a:lstStyle/>
           <a:p>
-            <a:pPr marL="0" indent="0" algn="l">
-              <a:buNone/>
-            </a:pPr>
-            <a:r>
-              <a:rPr lang="en-US" sz="1300" b="1" kern="0" spc="300" dirty="0">
+            <a:pPr algn="l" indent="0" marL="0">
+              <a:buNone/>
+            </a:pPr>
+            <a:r>
+              <a:rPr lang="en-US" sz="1300" b="1" spc="300" kern="0" dirty="0">
                 <a:solidFill>
                   <a:srgbClr val="8A6C1E"/>
                 </a:solidFill>
@@ -4477,7 +4697,7 @@
           <a:bodyPr wrap="square" lIns="0" tIns="0" rIns="0" bIns="0" rtlCol="0" anchor="ctr"/>
           <a:lstStyle/>
           <a:p>
-            <a:pPr marL="0" indent="0" algn="l">
+            <a:pPr algn="l" indent="0" marL="0">
               <a:buNone/>
             </a:pPr>
             <a:r>
@@ -4521,13 +4741,6 @@
             <a:prstDash val="solid"/>
           </a:ln>
         </p:spPr>
-        <p:txBody>
-          <a:bodyPr/>
-          <a:lstStyle/>
-          <a:p>
-            <a:endParaRPr lang="en-US"/>
-          </a:p>
-        </p:txBody>
       </p:sp>
       <p:sp>
         <p:nvSpPr>
@@ -4548,13 +4761,6 @@
           </a:solidFill>
           <a:ln/>
         </p:spPr>
-        <p:txBody>
-          <a:bodyPr/>
-          <a:lstStyle/>
-          <a:p>
-            <a:endParaRPr lang="en-US"/>
-          </a:p>
-        </p:txBody>
       </p:sp>
       <p:sp>
         <p:nvSpPr>
@@ -4577,7 +4783,7 @@
           <a:bodyPr wrap="square" lIns="0" tIns="0" rIns="0" bIns="0" rtlCol="0" anchor="ctr"/>
           <a:lstStyle/>
           <a:p>
-            <a:pPr marL="0" indent="0" algn="ctr">
+            <a:pPr algn="ctr" indent="0" marL="0">
               <a:buNone/>
             </a:pPr>
             <a:r>
@@ -4616,7 +4822,7 @@
           <a:bodyPr wrap="square" lIns="0" tIns="0" rIns="0" bIns="0" rtlCol="0" anchor="ctr"/>
           <a:lstStyle/>
           <a:p>
-            <a:pPr marL="0" indent="0">
+            <a:pPr indent="0" marL="0">
               <a:lnSpc>
                 <a:spcPct val="102000"/>
               </a:lnSpc>
@@ -4658,7 +4864,7 @@
           <a:bodyPr wrap="square" lIns="0" tIns="0" rIns="0" bIns="0" rtlCol="0" anchor="ctr"/>
           <a:lstStyle/>
           <a:p>
-            <a:pPr marL="0" indent="0">
+            <a:pPr indent="0" marL="0">
               <a:lnSpc>
                 <a:spcPct val="108000"/>
               </a:lnSpc>
@@ -4700,7 +4906,7 @@
           <a:bodyPr wrap="square" lIns="0" tIns="0" rIns="0" bIns="0" rtlCol="0" anchor="ctr"/>
           <a:lstStyle/>
           <a:p>
-            <a:pPr marL="0" indent="0" algn="ctr">
+            <a:pPr algn="ctr" indent="0" marL="0">
               <a:buNone/>
             </a:pPr>
             <a:r>
@@ -4744,13 +4950,6 @@
             <a:prstDash val="solid"/>
           </a:ln>
         </p:spPr>
-        <p:txBody>
-          <a:bodyPr/>
-          <a:lstStyle/>
-          <a:p>
-            <a:endParaRPr lang="en-US"/>
-          </a:p>
-        </p:txBody>
       </p:sp>
       <p:sp>
         <p:nvSpPr>
@@ -4771,13 +4970,6 @@
           </a:solidFill>
           <a:ln/>
         </p:spPr>
-        <p:txBody>
-          <a:bodyPr/>
-          <a:lstStyle/>
-          <a:p>
-            <a:endParaRPr lang="en-US"/>
-          </a:p>
-        </p:txBody>
       </p:sp>
       <p:sp>
         <p:nvSpPr>
@@ -4800,7 +4992,7 @@
           <a:bodyPr wrap="square" lIns="0" tIns="0" rIns="0" bIns="0" rtlCol="0" anchor="ctr"/>
           <a:lstStyle/>
           <a:p>
-            <a:pPr marL="0" indent="0" algn="ctr">
+            <a:pPr algn="ctr" indent="0" marL="0">
               <a:buNone/>
             </a:pPr>
             <a:r>
@@ -4839,7 +5031,7 @@
           <a:bodyPr wrap="square" lIns="0" tIns="0" rIns="0" bIns="0" rtlCol="0" anchor="ctr"/>
           <a:lstStyle/>
           <a:p>
-            <a:pPr marL="0" indent="0">
+            <a:pPr indent="0" marL="0">
               <a:lnSpc>
                 <a:spcPct val="102000"/>
               </a:lnSpc>
@@ -4881,7 +5073,7 @@
           <a:bodyPr wrap="square" lIns="0" tIns="0" rIns="0" bIns="0" rtlCol="0" anchor="ctr"/>
           <a:lstStyle/>
           <a:p>
-            <a:pPr marL="0" indent="0">
+            <a:pPr indent="0" marL="0">
               <a:lnSpc>
                 <a:spcPct val="108000"/>
               </a:lnSpc>
@@ -4923,7 +5115,7 @@
           <a:bodyPr wrap="square" lIns="0" tIns="0" rIns="0" bIns="0" rtlCol="0" anchor="ctr"/>
           <a:lstStyle/>
           <a:p>
-            <a:pPr marL="0" indent="0" algn="ctr">
+            <a:pPr algn="ctr" indent="0" marL="0">
               <a:buNone/>
             </a:pPr>
             <a:r>
@@ -4967,13 +5159,6 @@
             <a:prstDash val="solid"/>
           </a:ln>
         </p:spPr>
-        <p:txBody>
-          <a:bodyPr/>
-          <a:lstStyle/>
-          <a:p>
-            <a:endParaRPr lang="en-US"/>
-          </a:p>
-        </p:txBody>
       </p:sp>
       <p:sp>
         <p:nvSpPr>
@@ -4994,13 +5179,6 @@
           </a:solidFill>
           <a:ln/>
         </p:spPr>
-        <p:txBody>
-          <a:bodyPr/>
-          <a:lstStyle/>
-          <a:p>
-            <a:endParaRPr lang="en-US"/>
-          </a:p>
-        </p:txBody>
       </p:sp>
       <p:sp>
         <p:nvSpPr>
@@ -5023,7 +5201,7 @@
           <a:bodyPr wrap="square" lIns="0" tIns="0" rIns="0" bIns="0" rtlCol="0" anchor="ctr"/>
           <a:lstStyle/>
           <a:p>
-            <a:pPr marL="0" indent="0" algn="ctr">
+            <a:pPr algn="ctr" indent="0" marL="0">
               <a:buNone/>
             </a:pPr>
             <a:r>
@@ -5062,7 +5240,7 @@
           <a:bodyPr wrap="square" lIns="0" tIns="0" rIns="0" bIns="0" rtlCol="0" anchor="ctr"/>
           <a:lstStyle/>
           <a:p>
-            <a:pPr marL="0" indent="0">
+            <a:pPr indent="0" marL="0">
               <a:lnSpc>
                 <a:spcPct val="102000"/>
               </a:lnSpc>
@@ -5104,7 +5282,7 @@
           <a:bodyPr wrap="square" lIns="0" tIns="0" rIns="0" bIns="0" rtlCol="0" anchor="ctr"/>
           <a:lstStyle/>
           <a:p>
-            <a:pPr marL="0" indent="0">
+            <a:pPr indent="0" marL="0">
               <a:lnSpc>
                 <a:spcPct val="108000"/>
               </a:lnSpc>
@@ -5146,7 +5324,7 @@
           <a:bodyPr wrap="square" lIns="0" tIns="0" rIns="0" bIns="0" rtlCol="0" anchor="ctr"/>
           <a:lstStyle/>
           <a:p>
-            <a:pPr marL="0" indent="0" algn="ctr">
+            <a:pPr algn="ctr" indent="0" marL="0">
               <a:buNone/>
             </a:pPr>
             <a:r>
@@ -5190,13 +5368,6 @@
             <a:prstDash val="solid"/>
           </a:ln>
         </p:spPr>
-        <p:txBody>
-          <a:bodyPr/>
-          <a:lstStyle/>
-          <a:p>
-            <a:endParaRPr lang="en-US"/>
-          </a:p>
-        </p:txBody>
       </p:sp>
       <p:sp>
         <p:nvSpPr>
@@ -5217,13 +5388,6 @@
           </a:solidFill>
           <a:ln/>
         </p:spPr>
-        <p:txBody>
-          <a:bodyPr/>
-          <a:lstStyle/>
-          <a:p>
-            <a:endParaRPr lang="en-US"/>
-          </a:p>
-        </p:txBody>
       </p:sp>
       <p:sp>
         <p:nvSpPr>
@@ -5246,7 +5410,7 @@
           <a:bodyPr wrap="square" lIns="0" tIns="0" rIns="0" bIns="0" rtlCol="0" anchor="ctr"/>
           <a:lstStyle/>
           <a:p>
-            <a:pPr marL="0" indent="0" algn="ctr">
+            <a:pPr algn="ctr" indent="0" marL="0">
               <a:buNone/>
             </a:pPr>
             <a:r>
@@ -5285,7 +5449,7 @@
           <a:bodyPr wrap="square" lIns="0" tIns="0" rIns="0" bIns="0" rtlCol="0" anchor="ctr"/>
           <a:lstStyle/>
           <a:p>
-            <a:pPr marL="0" indent="0">
+            <a:pPr indent="0" marL="0">
               <a:lnSpc>
                 <a:spcPct val="102000"/>
               </a:lnSpc>
@@ -5327,7 +5491,7 @@
           <a:bodyPr wrap="square" lIns="0" tIns="0" rIns="0" bIns="0" rtlCol="0" anchor="ctr"/>
           <a:lstStyle/>
           <a:p>
-            <a:pPr marL="0" indent="0">
+            <a:pPr indent="0" marL="0">
               <a:lnSpc>
                 <a:spcPct val="108000"/>
               </a:lnSpc>
@@ -5374,24 +5538,17 @@
             <a:prstDash val="solid"/>
           </a:ln>
         </p:spPr>
-        <p:txBody>
-          <a:bodyPr/>
-          <a:lstStyle/>
-          <a:p>
-            <a:endParaRPr lang="en-US"/>
-          </a:p>
-        </p:txBody>
       </p:sp>
       <p:pic>
         <p:nvPicPr>
-          <p:cNvPr id="28" name="Image 0" descr="/mnt/user-data/uploads/ai-tarot-projection/data/Cards-jpg/CardBacks.jpg"/>
+          <p:cNvPr id="28" name="Image 0" descr="/mnt/user-data/uploads/ai-tarot-projection/data/Cards-jpg/CardBacks.jpg">    </p:cNvPr>
           <p:cNvPicPr>
             <a:picLocks noChangeAspect="1"/>
           </p:cNvPicPr>
           <p:nvPr/>
         </p:nvPicPr>
         <p:blipFill>
-          <a:blip r:embed="rId3"/>
+          <a:blip r:embed="rId1"/>
           <a:stretch>
             <a:fillRect/>
           </a:stretch>
@@ -5408,14 +5565,14 @@
       </p:pic>
       <p:pic>
         <p:nvPicPr>
-          <p:cNvPr id="29" name="Image 1" descr="/mnt/user-data/uploads/ai-tarot-projection/data/Cards-jpg/00-TheFool.jpg"/>
+          <p:cNvPr id="29" name="Image 1" descr="/mnt/user-data/uploads/ai-tarot-projection/data/Cards-jpg/00-TheFool.jpg">    </p:cNvPr>
           <p:cNvPicPr>
             <a:picLocks noChangeAspect="1"/>
           </p:cNvPicPr>
           <p:nvPr/>
         </p:nvPicPr>
         <p:blipFill>
-          <a:blip r:embed="rId4"/>
+          <a:blip r:embed="rId2"/>
           <a:stretch>
             <a:fillRect/>
           </a:stretch>
@@ -5451,7 +5608,7 @@
           <a:bodyPr wrap="square" lIns="0" tIns="0" rIns="0" bIns="0" rtlCol="0" anchor="ctr"/>
           <a:lstStyle/>
           <a:p>
-            <a:pPr marL="0" indent="0">
+            <a:pPr indent="0" marL="0">
               <a:lnSpc>
                 <a:spcPct val="115000"/>
               </a:lnSpc>
@@ -5468,6 +5625,12 @@
               </a:rPr>
               <a:t>The earned fourth card:  </a:t>
             </a:r>
+            <a:pPr indent="0" marL="0">
+              <a:lnSpc>
+                <a:spcPct val="115000"/>
+              </a:lnSpc>
+              <a:buNone/>
+            </a:pPr>
             <a:r>
               <a:rPr lang="en-US" sz="1450" dirty="0">
                 <a:solidFill>
@@ -5479,6 +5642,12 @@
               </a:rPr>
               <a:t>an epilogue that only exists when the reading earned it. Otherwise, </a:t>
             </a:r>
+            <a:pPr indent="0" marL="0">
+              <a:lnSpc>
+                <a:spcPct val="115000"/>
+              </a:lnSpc>
+              <a:buNone/>
+            </a:pPr>
             <a:r>
               <a:rPr lang="en-US" sz="1450" i="1" dirty="0">
                 <a:solidFill>
@@ -5515,7 +5684,7 @@
           <a:bodyPr wrap="square" lIns="0" tIns="0" rIns="0" bIns="0" rtlCol="0" anchor="ctr"/>
           <a:lstStyle/>
           <a:p>
-            <a:pPr marL="0" indent="0" algn="r">
+            <a:pPr algn="r" indent="0" marL="0">
               <a:buNone/>
             </a:pPr>
             <a:r>
@@ -5549,7 +5718,6 @@
         <a:solidFill>
           <a:srgbClr val="FFFFFF"/>
         </a:solidFill>
-        <a:effectLst/>
       </p:bgPr>
     </p:bg>
     <p:spTree>
@@ -5587,11 +5755,11 @@
           <a:bodyPr wrap="square" lIns="0" tIns="0" rIns="0" bIns="0" rtlCol="0" anchor="ctr"/>
           <a:lstStyle/>
           <a:p>
-            <a:pPr marL="0" indent="0" algn="l">
-              <a:buNone/>
-            </a:pPr>
-            <a:r>
-              <a:rPr lang="en-US" sz="1300" b="1" kern="0" spc="300" dirty="0">
+            <a:pPr algn="l" indent="0" marL="0">
+              <a:buNone/>
+            </a:pPr>
+            <a:r>
+              <a:rPr lang="en-US" sz="1300" b="1" spc="300" kern="0" dirty="0">
                 <a:solidFill>
                   <a:srgbClr val="8A6C1E"/>
                 </a:solidFill>
@@ -5626,7 +5794,7 @@
           <a:bodyPr wrap="square" lIns="0" tIns="0" rIns="0" bIns="0" rtlCol="0" anchor="ctr"/>
           <a:lstStyle/>
           <a:p>
-            <a:pPr marL="0" indent="0" algn="l">
+            <a:pPr algn="l" indent="0" marL="0">
               <a:buNone/>
             </a:pPr>
             <a:r>
@@ -5670,13 +5838,6 @@
             <a:prstDash val="solid"/>
           </a:ln>
         </p:spPr>
-        <p:txBody>
-          <a:bodyPr/>
-          <a:lstStyle/>
-          <a:p>
-            <a:endParaRPr lang="en-US"/>
-          </a:p>
-        </p:txBody>
       </p:sp>
       <p:sp>
         <p:nvSpPr>
@@ -5699,7 +5860,7 @@
           <a:bodyPr wrap="square" lIns="0" tIns="0" rIns="0" bIns="0" rtlCol="0" anchor="ctr"/>
           <a:lstStyle/>
           <a:p>
-            <a:pPr marL="0" indent="0" algn="ctr">
+            <a:pPr algn="ctr" indent="0" marL="0">
               <a:buNone/>
             </a:pPr>
             <a:r>
@@ -5716,7 +5877,7 @@
             <a:endParaRPr lang="en-US" sz="1400" dirty="0"/>
           </a:p>
           <a:p>
-            <a:pPr marL="0" indent="0" algn="ctr">
+            <a:pPr algn="ctr" indent="0" marL="0">
               <a:buNone/>
             </a:pPr>
             <a:r>
@@ -5755,7 +5916,7 @@
           <a:bodyPr wrap="square" lIns="0" tIns="0" rIns="0" bIns="0" rtlCol="0" anchor="ctr"/>
           <a:lstStyle/>
           <a:p>
-            <a:pPr marL="0" indent="0" algn="ctr">
+            <a:pPr algn="ctr" indent="0" marL="0">
               <a:buNone/>
             </a:pPr>
             <a:r>
@@ -5799,13 +5960,6 @@
             <a:prstDash val="solid"/>
           </a:ln>
         </p:spPr>
-        <p:txBody>
-          <a:bodyPr/>
-          <a:lstStyle/>
-          <a:p>
-            <a:endParaRPr lang="en-US"/>
-          </a:p>
-        </p:txBody>
       </p:sp>
       <p:sp>
         <p:nvSpPr>
@@ -5828,7 +5982,7 @@
           <a:bodyPr wrap="square" lIns="0" tIns="0" rIns="0" bIns="0" rtlCol="0" anchor="ctr"/>
           <a:lstStyle/>
           <a:p>
-            <a:pPr marL="0" indent="0" algn="ctr">
+            <a:pPr algn="ctr" indent="0" marL="0">
               <a:buNone/>
             </a:pPr>
             <a:r>
@@ -5845,7 +5999,7 @@
             <a:endParaRPr lang="en-US" sz="1400" dirty="0"/>
           </a:p>
           <a:p>
-            <a:pPr marL="0" indent="0" algn="ctr">
+            <a:pPr algn="ctr" indent="0" marL="0">
               <a:buNone/>
             </a:pPr>
             <a:r>
@@ -5884,7 +6038,7 @@
           <a:bodyPr wrap="square" lIns="0" tIns="0" rIns="0" bIns="0" rtlCol="0" anchor="ctr"/>
           <a:lstStyle/>
           <a:p>
-            <a:pPr marL="0" indent="0" algn="ctr">
+            <a:pPr algn="ctr" indent="0" marL="0">
               <a:buNone/>
             </a:pPr>
             <a:r>
@@ -5928,13 +6082,6 @@
             <a:prstDash val="solid"/>
           </a:ln>
         </p:spPr>
-        <p:txBody>
-          <a:bodyPr/>
-          <a:lstStyle/>
-          <a:p>
-            <a:endParaRPr lang="en-US"/>
-          </a:p>
-        </p:txBody>
       </p:sp>
       <p:sp>
         <p:nvSpPr>
@@ -5957,7 +6104,7 @@
           <a:bodyPr wrap="square" lIns="0" tIns="0" rIns="0" bIns="0" rtlCol="0" anchor="ctr"/>
           <a:lstStyle/>
           <a:p>
-            <a:pPr marL="0" indent="0" algn="ctr">
+            <a:pPr algn="ctr" indent="0" marL="0">
               <a:buNone/>
             </a:pPr>
             <a:r>
@@ -5974,7 +6121,7 @@
             <a:endParaRPr lang="en-US" sz="1400" dirty="0"/>
           </a:p>
           <a:p>
-            <a:pPr marL="0" indent="0" algn="ctr">
+            <a:pPr algn="ctr" indent="0" marL="0">
               <a:buNone/>
             </a:pPr>
             <a:r>
@@ -6013,7 +6160,7 @@
           <a:bodyPr wrap="square" lIns="0" tIns="0" rIns="0" bIns="0" rtlCol="0" anchor="ctr"/>
           <a:lstStyle/>
           <a:p>
-            <a:pPr marL="0" indent="0" algn="ctr">
+            <a:pPr algn="ctr" indent="0" marL="0">
               <a:buNone/>
             </a:pPr>
             <a:r>
@@ -6057,13 +6204,6 @@
             <a:prstDash val="dash"/>
           </a:ln>
         </p:spPr>
-        <p:txBody>
-          <a:bodyPr/>
-          <a:lstStyle/>
-          <a:p>
-            <a:endParaRPr lang="en-US"/>
-          </a:p>
-        </p:txBody>
       </p:sp>
       <p:sp>
         <p:nvSpPr>
@@ -6086,7 +6226,7 @@
           <a:bodyPr wrap="square" lIns="0" tIns="0" rIns="0" bIns="0" rtlCol="0" anchor="ctr"/>
           <a:lstStyle/>
           <a:p>
-            <a:pPr marL="0" indent="0" algn="ctr">
+            <a:pPr algn="ctr" indent="0" marL="0">
               <a:buNone/>
             </a:pPr>
             <a:r>
@@ -6103,7 +6243,7 @@
             <a:endParaRPr lang="en-US" sz="1300" dirty="0"/>
           </a:p>
           <a:p>
-            <a:pPr marL="0" indent="0" algn="ctr">
+            <a:pPr algn="ctr" indent="0" marL="0">
               <a:buNone/>
             </a:pPr>
             <a:r>
@@ -6142,7 +6282,7 @@
           <a:bodyPr wrap="square" lIns="0" tIns="0" rIns="0" bIns="0" rtlCol="0" anchor="ctr"/>
           <a:lstStyle/>
           <a:p>
-            <a:pPr marL="0" indent="0">
+            <a:pPr indent="0" marL="0">
               <a:lnSpc>
                 <a:spcPct val="112000"/>
               </a:lnSpc>
@@ -6182,24 +6322,17 @@
           </a:solidFill>
           <a:ln/>
         </p:spPr>
-        <p:txBody>
-          <a:bodyPr/>
-          <a:lstStyle/>
-          <a:p>
-            <a:endParaRPr lang="en-US"/>
-          </a:p>
-        </p:txBody>
       </p:sp>
       <p:pic>
         <p:nvPicPr>
-          <p:cNvPr id="17" name="Image 0" descr="/home/claude/tarot-deck/icons/anchor-gold.png"/>
+          <p:cNvPr id="17" name="Image 0" descr="/home/claude/tarot-deck/icons/anchor-gold.png">    </p:cNvPr>
           <p:cNvPicPr>
             <a:picLocks noChangeAspect="1"/>
           </p:cNvPicPr>
           <p:nvPr/>
         </p:nvPicPr>
         <p:blipFill>
-          <a:blip r:embed="rId3"/>
+          <a:blip r:embed="rId1"/>
           <a:stretch>
             <a:fillRect/>
           </a:stretch>
@@ -6235,7 +6368,7 @@
           <a:bodyPr wrap="square" lIns="0" tIns="0" rIns="0" bIns="0" rtlCol="0" anchor="t"/>
           <a:lstStyle/>
           <a:p>
-            <a:pPr marL="0" indent="0" algn="l">
+            <a:pPr algn="l" indent="0" marL="0">
               <a:lnSpc>
                 <a:spcPct val="110000"/>
               </a:lnSpc>
@@ -6255,7 +6388,7 @@
             <a:endParaRPr lang="en-US" sz="1700" dirty="0"/>
           </a:p>
           <a:p>
-            <a:pPr marL="0" indent="0" algn="l">
+            <a:pPr algn="l" indent="0" marL="0">
               <a:lnSpc>
                 <a:spcPct val="110000"/>
               </a:lnSpc>
@@ -6295,24 +6428,17 @@
           </a:solidFill>
           <a:ln/>
         </p:spPr>
-        <p:txBody>
-          <a:bodyPr/>
-          <a:lstStyle/>
-          <a:p>
-            <a:endParaRPr lang="en-US"/>
-          </a:p>
-        </p:txBody>
       </p:sp>
       <p:pic>
         <p:nvPicPr>
-          <p:cNvPr id="20" name="Image 1" descr="/home/claude/tarot-deck/icons/list-gold.png"/>
+          <p:cNvPr id="20" name="Image 1" descr="/home/claude/tarot-deck/icons/list-gold.png">    </p:cNvPr>
           <p:cNvPicPr>
             <a:picLocks noChangeAspect="1"/>
           </p:cNvPicPr>
           <p:nvPr/>
         </p:nvPicPr>
         <p:blipFill>
-          <a:blip r:embed="rId4"/>
+          <a:blip r:embed="rId2"/>
           <a:stretch>
             <a:fillRect/>
           </a:stretch>
@@ -6348,7 +6474,7 @@
           <a:bodyPr wrap="square" lIns="0" tIns="0" rIns="0" bIns="0" rtlCol="0" anchor="t"/>
           <a:lstStyle/>
           <a:p>
-            <a:pPr marL="0" indent="0" algn="l">
+            <a:pPr algn="l" indent="0" marL="0">
               <a:lnSpc>
                 <a:spcPct val="110000"/>
               </a:lnSpc>
@@ -6368,7 +6494,7 @@
             <a:endParaRPr lang="en-US" sz="1700" dirty="0"/>
           </a:p>
           <a:p>
-            <a:pPr marL="0" indent="0" algn="l">
+            <a:pPr algn="l" indent="0" marL="0">
               <a:lnSpc>
                 <a:spcPct val="110000"/>
               </a:lnSpc>
@@ -6410,7 +6536,7 @@
           <a:bodyPr wrap="square" lIns="0" tIns="0" rIns="0" bIns="0" rtlCol="0" anchor="ctr"/>
           <a:lstStyle/>
           <a:p>
-            <a:pPr marL="0" indent="0" algn="r">
+            <a:pPr algn="r" indent="0" marL="0">
               <a:buNone/>
             </a:pPr>
             <a:r>
@@ -6444,7 +6570,6 @@
         <a:solidFill>
           <a:srgbClr val="FFFFFF"/>
         </a:solidFill>
-        <a:effectLst/>
       </p:bgPr>
     </p:bg>
     <p:spTree>
@@ -6482,11 +6607,11 @@
           <a:bodyPr wrap="square" lIns="0" tIns="0" rIns="0" bIns="0" rtlCol="0" anchor="ctr"/>
           <a:lstStyle/>
           <a:p>
-            <a:pPr marL="0" indent="0" algn="l">
-              <a:buNone/>
-            </a:pPr>
-            <a:r>
-              <a:rPr lang="en-US" sz="1300" b="1" kern="0" spc="300" dirty="0">
+            <a:pPr algn="l" indent="0" marL="0">
+              <a:buNone/>
+            </a:pPr>
+            <a:r>
+              <a:rPr lang="en-US" sz="1300" b="1" spc="300" kern="0" dirty="0">
                 <a:solidFill>
                   <a:srgbClr val="8A6C1E"/>
                 </a:solidFill>
@@ -6521,7 +6646,7 @@
           <a:bodyPr wrap="square" lIns="0" tIns="0" rIns="0" bIns="0" rtlCol="0" anchor="ctr"/>
           <a:lstStyle/>
           <a:p>
-            <a:pPr marL="0" indent="0" algn="l">
+            <a:pPr algn="l" indent="0" marL="0">
               <a:buNone/>
             </a:pPr>
             <a:r>
@@ -6565,13 +6690,6 @@
             <a:prstDash val="solid"/>
           </a:ln>
         </p:spPr>
-        <p:txBody>
-          <a:bodyPr/>
-          <a:lstStyle/>
-          <a:p>
-            <a:endParaRPr lang="en-US"/>
-          </a:p>
-        </p:txBody>
       </p:sp>
       <p:sp>
         <p:nvSpPr>
@@ -6594,7 +6712,7 @@
           <a:bodyPr wrap="square" lIns="0" tIns="0" rIns="0" bIns="0" rtlCol="0" anchor="ctr"/>
           <a:lstStyle/>
           <a:p>
-            <a:pPr marL="0" indent="0" algn="ctr">
+            <a:pPr algn="ctr" indent="0" marL="0">
               <a:buNone/>
             </a:pPr>
             <a:r>
@@ -6611,7 +6729,7 @@
             <a:endParaRPr lang="en-US" sz="1400" dirty="0"/>
           </a:p>
           <a:p>
-            <a:pPr marL="0" indent="0" algn="ctr">
+            <a:pPr algn="ctr" indent="0" marL="0">
               <a:buNone/>
             </a:pPr>
             <a:r>
@@ -6655,13 +6773,6 @@
             <a:prstDash val="solid"/>
           </a:ln>
         </p:spPr>
-        <p:txBody>
-          <a:bodyPr/>
-          <a:lstStyle/>
-          <a:p>
-            <a:endParaRPr lang="en-US"/>
-          </a:p>
-        </p:txBody>
       </p:sp>
       <p:sp>
         <p:nvSpPr>
@@ -6684,7 +6795,7 @@
           <a:bodyPr wrap="square" lIns="0" tIns="0" rIns="0" bIns="0" rtlCol="0" anchor="ctr"/>
           <a:lstStyle/>
           <a:p>
-            <a:pPr marL="0" indent="0" algn="ctr">
+            <a:pPr algn="ctr" indent="0" marL="0">
               <a:buNone/>
             </a:pPr>
             <a:r>
@@ -6701,7 +6812,7 @@
             <a:endParaRPr lang="en-US" sz="1400" dirty="0"/>
           </a:p>
           <a:p>
-            <a:pPr marL="0" indent="0" algn="ctr">
+            <a:pPr algn="ctr" indent="0" marL="0">
               <a:buNone/>
             </a:pPr>
             <a:r>
@@ -6745,13 +6856,6 @@
             <a:prstDash val="solid"/>
           </a:ln>
         </p:spPr>
-        <p:txBody>
-          <a:bodyPr/>
-          <a:lstStyle/>
-          <a:p>
-            <a:endParaRPr lang="en-US"/>
-          </a:p>
-        </p:txBody>
       </p:sp>
       <p:sp>
         <p:nvSpPr>
@@ -6774,7 +6878,7 @@
           <a:bodyPr wrap="square" lIns="0" tIns="0" rIns="0" bIns="0" rtlCol="0" anchor="ctr"/>
           <a:lstStyle/>
           <a:p>
-            <a:pPr marL="0" indent="0" algn="ctr">
+            <a:pPr algn="ctr" indent="0" marL="0">
               <a:buNone/>
             </a:pPr>
             <a:r>
@@ -6791,7 +6895,7 @@
             <a:endParaRPr lang="en-US" sz="1400" dirty="0"/>
           </a:p>
           <a:p>
-            <a:pPr marL="0" indent="0" algn="ctr">
+            <a:pPr algn="ctr" indent="0" marL="0">
               <a:buNone/>
             </a:pPr>
             <a:r>
@@ -6835,13 +6939,6 @@
             <a:prstDash val="solid"/>
           </a:ln>
         </p:spPr>
-        <p:txBody>
-          <a:bodyPr/>
-          <a:lstStyle/>
-          <a:p>
-            <a:endParaRPr lang="en-US"/>
-          </a:p>
-        </p:txBody>
       </p:sp>
       <p:sp>
         <p:nvSpPr>
@@ -6864,7 +6961,7 @@
           <a:bodyPr wrap="square" lIns="0" tIns="0" rIns="0" bIns="0" rtlCol="0" anchor="ctr"/>
           <a:lstStyle/>
           <a:p>
-            <a:pPr marL="0" indent="0" algn="ctr">
+            <a:pPr algn="ctr" indent="0" marL="0">
               <a:buNone/>
             </a:pPr>
             <a:r>
@@ -6881,7 +6978,7 @@
             <a:endParaRPr lang="en-US" sz="1400" dirty="0"/>
           </a:p>
           <a:p>
-            <a:pPr marL="0" indent="0" algn="ctr">
+            <a:pPr algn="ctr" indent="0" marL="0">
               <a:buNone/>
             </a:pPr>
             <a:r>
@@ -6925,13 +7022,6 @@
             <a:prstDash val="solid"/>
           </a:ln>
         </p:spPr>
-        <p:txBody>
-          <a:bodyPr/>
-          <a:lstStyle/>
-          <a:p>
-            <a:endParaRPr lang="en-US"/>
-          </a:p>
-        </p:txBody>
       </p:sp>
       <p:sp>
         <p:nvSpPr>
@@ -6954,7 +7044,7 @@
           <a:bodyPr wrap="square" lIns="0" tIns="0" rIns="0" bIns="0" rtlCol="0" anchor="ctr"/>
           <a:lstStyle/>
           <a:p>
-            <a:pPr marL="0" indent="0" algn="ctr">
+            <a:pPr algn="ctr" indent="0" marL="0">
               <a:buNone/>
             </a:pPr>
             <a:r>
@@ -6971,7 +7061,7 @@
             <a:endParaRPr lang="en-US" sz="1400" dirty="0"/>
           </a:p>
           <a:p>
-            <a:pPr marL="0" indent="0" algn="ctr">
+            <a:pPr algn="ctr" indent="0" marL="0">
               <a:buNone/>
             </a:pPr>
             <a:r>
@@ -7010,7 +7100,7 @@
           <a:bodyPr wrap="square" lIns="0" tIns="0" rIns="0" bIns="0" rtlCol="0" anchor="ctr"/>
           <a:lstStyle/>
           <a:p>
-            <a:pPr marL="0" indent="0">
+            <a:pPr indent="0" marL="0">
               <a:buNone/>
             </a:pPr>
             <a:r>
@@ -7036,7 +7126,7 @@
         </p:nvSpPr>
         <p:spPr>
           <a:xfrm>
-            <a:off x="7315200" y="1984248"/>
+            <a:off x="7315200" y="1847088"/>
             <a:ext cx="512064" cy="512064"/>
           </a:xfrm>
           <a:prstGeom prst="ellipse">
@@ -7047,17 +7137,222 @@
           </a:solidFill>
           <a:ln/>
         </p:spPr>
-        <p:txBody>
-          <a:bodyPr/>
-          <a:lstStyle/>
-          <a:p>
-            <a:endParaRPr lang="en-US"/>
-          </a:p>
-        </p:txBody>
       </p:sp>
       <p:pic>
         <p:nvPicPr>
-          <p:cNvPr id="16" name="Image 0" descr="/home/claude/tarot-deck/icons/trending-gold.png"/>
+          <p:cNvPr id="16" name="Image 0" descr="/home/claude/tarot-deck/icons/trending-gold.png">    </p:cNvPr>
+          <p:cNvPicPr>
+            <a:picLocks noChangeAspect="1"/>
+          </p:cNvPicPr>
+          <p:nvPr/>
+        </p:nvPicPr>
+        <p:blipFill>
+          <a:blip r:embed="rId1"/>
+          <a:stretch>
+            <a:fillRect/>
+          </a:stretch>
+        </p:blipFill>
+        <p:spPr>
+          <a:xfrm>
+            <a:off x="7443216" y="1975104"/>
+            <a:ext cx="256032" cy="256032"/>
+          </a:xfrm>
+          <a:prstGeom prst="rect">
+            <a:avLst/>
+          </a:prstGeom>
+        </p:spPr>
+      </p:pic>
+      <p:sp>
+        <p:nvSpPr>
+          <p:cNvPr id="17" name="Text 14"/>
+          <p:cNvSpPr txBox="1"/>
+          <p:nvPr/>
+        </p:nvSpPr>
+        <p:spPr>
+          <a:xfrm>
+            <a:off x="8046720" y="1828800"/>
+            <a:ext cx="3566160" cy="1051560"/>
+          </a:xfrm>
+          <a:prstGeom prst="rect">
+            <a:avLst/>
+          </a:prstGeom>
+          <a:noFill/>
+          <a:ln/>
+        </p:spPr>
+        <p:txBody>
+          <a:bodyPr wrap="square" lIns="0" tIns="0" rIns="0" bIns="0" rtlCol="0" anchor="t"/>
+          <a:lstStyle/>
+          <a:p>
+            <a:pPr algn="l" indent="0" marL="0">
+              <a:lnSpc>
+                <a:spcPct val="110000"/>
+              </a:lnSpc>
+              <a:buNone/>
+            </a:pPr>
+            <a:r>
+              <a:rPr lang="en-US" sz="1700" b="1" dirty="0">
+                <a:solidFill>
+                  <a:srgbClr val="2B2545"/>
+                </a:solidFill>
+                <a:latin typeface="Calibri" pitchFamily="34" charset="0"/>
+                <a:ea typeface="Calibri" pitchFamily="34" charset="-122"/>
+                <a:cs typeface="Calibri" pitchFamily="34" charset="-120"/>
+              </a:rPr>
+              <a:t>One rung above you, never two</a:t>
+            </a:r>
+            <a:endParaRPr lang="en-US" sz="1700" dirty="0"/>
+          </a:p>
+          <a:p>
+            <a:pPr algn="l" indent="0" marL="0">
+              <a:lnSpc>
+                <a:spcPct val="110000"/>
+              </a:lnSpc>
+              <a:buNone/>
+            </a:pPr>
+            <a:r>
+              <a:rPr lang="en-US" sz="1400" dirty="0">
+                <a:solidFill>
+                  <a:srgbClr val="5E5678"/>
+                </a:solidFill>
+                <a:latin typeface="Calibri" pitchFamily="34" charset="0"/>
+                <a:ea typeface="Calibri" pitchFamily="34" charset="-122"/>
+                <a:cs typeface="Calibri" pitchFamily="34" charset="-120"/>
+              </a:rPr>
+              <a:t>Two steps out is an answer you'd have to invent.</a:t>
+            </a:r>
+            <a:endParaRPr lang="en-US" sz="1700" dirty="0"/>
+          </a:p>
+        </p:txBody>
+      </p:sp>
+      <p:sp>
+        <p:nvSpPr>
+          <p:cNvPr id="18" name="Shape 15"/>
+          <p:cNvSpPr/>
+          <p:nvPr/>
+        </p:nvSpPr>
+        <p:spPr>
+          <a:xfrm>
+            <a:off x="7315200" y="2980944"/>
+            <a:ext cx="512064" cy="512064"/>
+          </a:xfrm>
+          <a:prstGeom prst="ellipse">
+            <a:avLst/>
+          </a:prstGeom>
+          <a:solidFill>
+            <a:srgbClr val="231C40"/>
+          </a:solidFill>
+          <a:ln/>
+        </p:spPr>
+      </p:sp>
+      <p:pic>
+        <p:nvPicPr>
+          <p:cNvPr id="19" name="Image 1" descr="/home/claude/tarot-deck/icons/repeat-gold.png">    </p:cNvPr>
+          <p:cNvPicPr>
+            <a:picLocks noChangeAspect="1"/>
+          </p:cNvPicPr>
+          <p:nvPr/>
+        </p:nvPicPr>
+        <p:blipFill>
+          <a:blip r:embed="rId2"/>
+          <a:stretch>
+            <a:fillRect/>
+          </a:stretch>
+        </p:blipFill>
+        <p:spPr>
+          <a:xfrm>
+            <a:off x="7443216" y="3108960"/>
+            <a:ext cx="256032" cy="256032"/>
+          </a:xfrm>
+          <a:prstGeom prst="rect">
+            <a:avLst/>
+          </a:prstGeom>
+        </p:spPr>
+      </p:pic>
+      <p:sp>
+        <p:nvSpPr>
+          <p:cNvPr id="20" name="Text 16"/>
+          <p:cNvSpPr txBox="1"/>
+          <p:nvPr/>
+        </p:nvSpPr>
+        <p:spPr>
+          <a:xfrm>
+            <a:off x="8046720" y="2962656"/>
+            <a:ext cx="3566160" cy="1051560"/>
+          </a:xfrm>
+          <a:prstGeom prst="rect">
+            <a:avLst/>
+          </a:prstGeom>
+          <a:noFill/>
+          <a:ln/>
+        </p:spPr>
+        <p:txBody>
+          <a:bodyPr wrap="square" lIns="0" tIns="0" rIns="0" bIns="0" rtlCol="0" anchor="t"/>
+          <a:lstStyle/>
+          <a:p>
+            <a:pPr algn="l" indent="0" marL="0">
+              <a:lnSpc>
+                <a:spcPct val="110000"/>
+              </a:lnSpc>
+              <a:buNone/>
+            </a:pPr>
+            <a:r>
+              <a:rPr lang="en-US" sz="1700" b="1" dirty="0">
+                <a:solidFill>
+                  <a:srgbClr val="2B2545"/>
+                </a:solidFill>
+                <a:latin typeface="Calibri" pitchFamily="34" charset="0"/>
+                <a:ea typeface="Calibri" pitchFamily="34" charset="-122"/>
+                <a:cs typeface="Calibri" pitchFamily="34" charset="-120"/>
+              </a:rPr>
+              <a:t>Two tracks: the picture, and your life</a:t>
+            </a:r>
+            <a:endParaRPr lang="en-US" sz="1700" dirty="0"/>
+          </a:p>
+          <a:p>
+            <a:pPr algn="l" indent="0" marL="0">
+              <a:lnSpc>
+                <a:spcPct val="110000"/>
+              </a:lnSpc>
+              <a:buNone/>
+            </a:pPr>
+            <a:r>
+              <a:rPr lang="en-US" sz="1400" dirty="0">
+                <a:solidFill>
+                  <a:srgbClr val="5E5678"/>
+                </a:solidFill>
+                <a:latin typeface="Calibri" pitchFamily="34" charset="0"/>
+                <a:ea typeface="Calibri" pitchFamily="34" charset="-122"/>
+                <a:cs typeface="Calibri" pitchFamily="34" charset="-120"/>
+              </a:rPr>
+              <a:t>Moving between them is a step of its own.</a:t>
+            </a:r>
+            <a:endParaRPr lang="en-US" sz="1700" dirty="0"/>
+          </a:p>
+        </p:txBody>
+      </p:sp>
+      <p:sp>
+        <p:nvSpPr>
+          <p:cNvPr id="21" name="Shape 17"/>
+          <p:cNvSpPr/>
+          <p:nvPr/>
+        </p:nvSpPr>
+        <p:spPr>
+          <a:xfrm>
+            <a:off x="7315200" y="4114800"/>
+            <a:ext cx="512064" cy="512064"/>
+          </a:xfrm>
+          <a:prstGeom prst="ellipse">
+            <a:avLst/>
+          </a:prstGeom>
+          <a:solidFill>
+            <a:srgbClr val="231C40"/>
+          </a:solidFill>
+          <a:ln/>
+        </p:spPr>
+      </p:sp>
+      <p:pic>
+        <p:nvPicPr>
+          <p:cNvPr id="22" name="Image 2" descr="/home/claude/tarot-deck/icons/heart-gold.png">    </p:cNvPr>
           <p:cNvPicPr>
             <a:picLocks noChangeAspect="1"/>
           </p:cNvPicPr>
@@ -7071,7 +7366,7 @@
         </p:blipFill>
         <p:spPr>
           <a:xfrm>
-            <a:off x="7443216" y="2112264"/>
+            <a:off x="7443216" y="4242816"/>
             <a:ext cx="256032" cy="256032"/>
           </a:xfrm>
           <a:prstGeom prst="rect">
@@ -7081,14 +7376,14 @@
       </p:pic>
       <p:sp>
         <p:nvSpPr>
-          <p:cNvPr id="17" name="Text 14"/>
-          <p:cNvSpPr txBox="1"/>
-          <p:nvPr/>
-        </p:nvSpPr>
-        <p:spPr>
-          <a:xfrm>
-            <a:off x="8046720" y="1965960"/>
-            <a:ext cx="3566160" cy="1097280"/>
+          <p:cNvPr id="23" name="Text 18"/>
+          <p:cNvSpPr txBox="1"/>
+          <p:nvPr/>
+        </p:nvSpPr>
+        <p:spPr>
+          <a:xfrm>
+            <a:off x="8046720" y="4096512"/>
+            <a:ext cx="3566160" cy="1051560"/>
           </a:xfrm>
           <a:prstGeom prst="rect">
             <a:avLst/>
@@ -7100,7 +7395,7 @@
           <a:bodyPr wrap="square" lIns="0" tIns="0" rIns="0" bIns="0" rtlCol="0" anchor="t"/>
           <a:lstStyle/>
           <a:p>
-            <a:pPr marL="0" indent="0" algn="l">
+            <a:pPr algn="l" indent="0" marL="0">
               <a:lnSpc>
                 <a:spcPct val="110000"/>
               </a:lnSpc>
@@ -7115,12 +7410,12 @@
                 <a:ea typeface="Calibri" pitchFamily="34" charset="-122"/>
                 <a:cs typeface="Calibri" pitchFamily="34" charset="-120"/>
               </a:rPr>
-              <a:t>One rung above you, never two</a:t>
+              <a:t>A dodge is respected</a:t>
             </a:r>
             <a:endParaRPr lang="en-US" sz="1700" dirty="0"/>
           </a:p>
           <a:p>
-            <a:pPr marL="0" indent="0" algn="l">
+            <a:pPr algn="l" indent="0" marL="0">
               <a:lnSpc>
                 <a:spcPct val="110000"/>
               </a:lnSpc>
@@ -7135,7 +7430,7 @@
                 <a:ea typeface="Calibri" pitchFamily="34" charset="-122"/>
                 <a:cs typeface="Calibri" pitchFamily="34" charset="-120"/>
               </a:rPr>
-              <a:t>Two steps out is an answer you'd have to invent.</a:t>
+              <a:t>It backs off and asks something smaller, more concrete.</a:t>
             </a:r>
             <a:endParaRPr lang="en-US" sz="1700" dirty="0"/>
           </a:p>
@@ -7143,13 +7438,13 @@
       </p:sp>
       <p:sp>
         <p:nvSpPr>
-          <p:cNvPr id="18" name="Shape 15"/>
+          <p:cNvPr id="24" name="Shape 19"/>
           <p:cNvSpPr/>
           <p:nvPr/>
         </p:nvSpPr>
         <p:spPr>
           <a:xfrm>
-            <a:off x="7315200" y="3355848"/>
+            <a:off x="7315200" y="5248656"/>
             <a:ext cx="512064" cy="512064"/>
           </a:xfrm>
           <a:prstGeom prst="ellipse">
@@ -7160,17 +7455,10 @@
           </a:solidFill>
           <a:ln/>
         </p:spPr>
-        <p:txBody>
-          <a:bodyPr/>
-          <a:lstStyle/>
-          <a:p>
-            <a:endParaRPr lang="en-US"/>
-          </a:p>
-        </p:txBody>
       </p:sp>
       <p:pic>
         <p:nvPicPr>
-          <p:cNvPr id="19" name="Image 1" descr="/home/claude/tarot-deck/icons/repeat-gold.png"/>
+          <p:cNvPr id="25" name="Image 3" descr="/home/claude/tarot-deck/icons/zap-gold.png">    </p:cNvPr>
           <p:cNvPicPr>
             <a:picLocks noChangeAspect="1"/>
           </p:cNvPicPr>
@@ -7184,7 +7472,7 @@
         </p:blipFill>
         <p:spPr>
           <a:xfrm>
-            <a:off x="7443216" y="3483864"/>
+            <a:off x="7443216" y="5376672"/>
             <a:ext cx="256032" cy="256032"/>
           </a:xfrm>
           <a:prstGeom prst="rect">
@@ -7194,14 +7482,14 @@
       </p:pic>
       <p:sp>
         <p:nvSpPr>
-          <p:cNvPr id="20" name="Text 16"/>
-          <p:cNvSpPr txBox="1"/>
-          <p:nvPr/>
-        </p:nvSpPr>
-        <p:spPr>
-          <a:xfrm>
-            <a:off x="8046720" y="3337560"/>
-            <a:ext cx="3566160" cy="1097280"/>
+          <p:cNvPr id="26" name="Text 20"/>
+          <p:cNvSpPr txBox="1"/>
+          <p:nvPr/>
+        </p:nvSpPr>
+        <p:spPr>
+          <a:xfrm>
+            <a:off x="8046720" y="5230368"/>
+            <a:ext cx="3566160" cy="1051560"/>
           </a:xfrm>
           <a:prstGeom prst="rect">
             <a:avLst/>
@@ -7213,7 +7501,7 @@
           <a:bodyPr wrap="square" lIns="0" tIns="0" rIns="0" bIns="0" rtlCol="0" anchor="t"/>
           <a:lstStyle/>
           <a:p>
-            <a:pPr marL="0" indent="0" algn="l">
+            <a:pPr algn="l" indent="0" marL="0">
               <a:lnSpc>
                 <a:spcPct val="110000"/>
               </a:lnSpc>
@@ -7228,12 +7516,12 @@
                 <a:ea typeface="Calibri" pitchFamily="34" charset="-122"/>
                 <a:cs typeface="Calibri" pitchFamily="34" charset="-120"/>
               </a:rPr>
-              <a:t>Two tracks: the picture, and your life</a:t>
+              <a:t>Card flips ride a separate track</a:t>
             </a:r>
             <a:endParaRPr lang="en-US" sz="1700" dirty="0"/>
           </a:p>
           <a:p>
-            <a:pPr marL="0" indent="0" algn="l">
+            <a:pPr algn="l" indent="0" marL="0">
               <a:lnSpc>
                 <a:spcPct val="110000"/>
               </a:lnSpc>
@@ -7248,7 +7536,7 @@
                 <a:ea typeface="Calibri" pitchFamily="34" charset="-122"/>
                 <a:cs typeface="Calibri" pitchFamily="34" charset="-120"/>
               </a:rPr>
-              <a:t>Moving between them is a step of its own.</a:t>
+              <a:t>Turning a card is earned by depth of sharing, not by ladder height.</a:t>
             </a:r>
             <a:endParaRPr lang="en-US" sz="1700" dirty="0"/>
           </a:p>
@@ -7256,120 +7544,7 @@
       </p:sp>
       <p:sp>
         <p:nvSpPr>
-          <p:cNvPr id="21" name="Shape 17"/>
-          <p:cNvSpPr/>
-          <p:nvPr/>
-        </p:nvSpPr>
-        <p:spPr>
-          <a:xfrm>
-            <a:off x="7315200" y="4727448"/>
-            <a:ext cx="512064" cy="512064"/>
-          </a:xfrm>
-          <a:prstGeom prst="ellipse">
-            <a:avLst/>
-          </a:prstGeom>
-          <a:solidFill>
-            <a:srgbClr val="231C40"/>
-          </a:solidFill>
-          <a:ln/>
-        </p:spPr>
-        <p:txBody>
-          <a:bodyPr/>
-          <a:lstStyle/>
-          <a:p>
-            <a:endParaRPr lang="en-US"/>
-          </a:p>
-        </p:txBody>
-      </p:sp>
-      <p:pic>
-        <p:nvPicPr>
-          <p:cNvPr id="22" name="Image 2" descr="/home/claude/tarot-deck/icons/heart-gold.png"/>
-          <p:cNvPicPr>
-            <a:picLocks noChangeAspect="1"/>
-          </p:cNvPicPr>
-          <p:nvPr/>
-        </p:nvPicPr>
-        <p:blipFill>
-          <a:blip r:embed="rId5"/>
-          <a:stretch>
-            <a:fillRect/>
-          </a:stretch>
-        </p:blipFill>
-        <p:spPr>
-          <a:xfrm>
-            <a:off x="7443216" y="4855464"/>
-            <a:ext cx="256032" cy="256032"/>
-          </a:xfrm>
-          <a:prstGeom prst="rect">
-            <a:avLst/>
-          </a:prstGeom>
-        </p:spPr>
-      </p:pic>
-      <p:sp>
-        <p:nvSpPr>
-          <p:cNvPr id="23" name="Text 18"/>
-          <p:cNvSpPr txBox="1"/>
-          <p:nvPr/>
-        </p:nvSpPr>
-        <p:spPr>
-          <a:xfrm>
-            <a:off x="8046720" y="4709160"/>
-            <a:ext cx="3566160" cy="1097280"/>
-          </a:xfrm>
-          <a:prstGeom prst="rect">
-            <a:avLst/>
-          </a:prstGeom>
-          <a:noFill/>
-          <a:ln/>
-        </p:spPr>
-        <p:txBody>
-          <a:bodyPr wrap="square" lIns="0" tIns="0" rIns="0" bIns="0" rtlCol="0" anchor="t"/>
-          <a:lstStyle/>
-          <a:p>
-            <a:pPr marL="0" indent="0" algn="l">
-              <a:lnSpc>
-                <a:spcPct val="110000"/>
-              </a:lnSpc>
-              <a:buNone/>
-            </a:pPr>
-            <a:r>
-              <a:rPr lang="en-US" sz="1700" b="1" dirty="0">
-                <a:solidFill>
-                  <a:srgbClr val="2B2545"/>
-                </a:solidFill>
-                <a:latin typeface="Calibri" pitchFamily="34" charset="0"/>
-                <a:ea typeface="Calibri" pitchFamily="34" charset="-122"/>
-                <a:cs typeface="Calibri" pitchFamily="34" charset="-120"/>
-              </a:rPr>
-              <a:t>A dodge is respected</a:t>
-            </a:r>
-            <a:endParaRPr lang="en-US" sz="1700" dirty="0"/>
-          </a:p>
-          <a:p>
-            <a:pPr marL="0" indent="0" algn="l">
-              <a:lnSpc>
-                <a:spcPct val="110000"/>
-              </a:lnSpc>
-              <a:buNone/>
-            </a:pPr>
-            <a:r>
-              <a:rPr lang="en-US" sz="1400" dirty="0">
-                <a:solidFill>
-                  <a:srgbClr val="5E5678"/>
-                </a:solidFill>
-                <a:latin typeface="Calibri" pitchFamily="34" charset="0"/>
-                <a:ea typeface="Calibri" pitchFamily="34" charset="-122"/>
-                <a:cs typeface="Calibri" pitchFamily="34" charset="-120"/>
-              </a:rPr>
-              <a:t>It backs off and asks something smaller, more concrete.</a:t>
-            </a:r>
-            <a:endParaRPr lang="en-US" sz="1700" dirty="0"/>
-          </a:p>
-        </p:txBody>
-      </p:sp>
-      <p:sp>
-        <p:nvSpPr>
-          <p:cNvPr id="24" name="Text 19"/>
+          <p:cNvPr id="27" name="Text 21"/>
           <p:cNvSpPr txBox="1"/>
           <p:nvPr/>
         </p:nvSpPr>
@@ -7388,7 +7563,7 @@
           <a:bodyPr wrap="square" lIns="0" tIns="0" rIns="0" bIns="0" rtlCol="0" anchor="ctr"/>
           <a:lstStyle/>
           <a:p>
-            <a:pPr marL="0" indent="0" algn="r">
+            <a:pPr algn="r" indent="0" marL="0">
               <a:buNone/>
             </a:pPr>
             <a:r>
@@ -7422,7 +7597,6 @@
         <a:solidFill>
           <a:srgbClr val="FFFFFF"/>
         </a:solidFill>
-        <a:effectLst/>
       </p:bgPr>
     </p:bg>
     <p:spTree>
@@ -7460,11 +7634,11 @@
           <a:bodyPr wrap="square" lIns="0" tIns="0" rIns="0" bIns="0" rtlCol="0" anchor="ctr"/>
           <a:lstStyle/>
           <a:p>
-            <a:pPr marL="0" indent="0" algn="l">
-              <a:buNone/>
-            </a:pPr>
-            <a:r>
-              <a:rPr lang="en-US" sz="1300" b="1" kern="0" spc="300" dirty="0">
+            <a:pPr algn="l" indent="0" marL="0">
+              <a:buNone/>
+            </a:pPr>
+            <a:r>
+              <a:rPr lang="en-US" sz="1300" b="1" spc="300" kern="0" dirty="0">
                 <a:solidFill>
                   <a:srgbClr val="8A6C1E"/>
                 </a:solidFill>
@@ -7499,7 +7673,7 @@
           <a:bodyPr wrap="square" lIns="0" tIns="0" rIns="0" bIns="0" rtlCol="0" anchor="ctr"/>
           <a:lstStyle/>
           <a:p>
-            <a:pPr marL="0" indent="0" algn="l">
+            <a:pPr algn="l" indent="0" marL="0">
               <a:buNone/>
             </a:pPr>
             <a:r>
@@ -7538,13 +7712,6 @@
           </a:solidFill>
           <a:ln/>
         </p:spPr>
-        <p:txBody>
-          <a:bodyPr/>
-          <a:lstStyle/>
-          <a:p>
-            <a:endParaRPr lang="en-US"/>
-          </a:p>
-        </p:txBody>
       </p:sp>
       <p:sp>
         <p:nvSpPr>
@@ -7567,7 +7734,7 @@
           <a:bodyPr wrap="square" lIns="0" tIns="0" rIns="0" bIns="0" rtlCol="0" anchor="ctr"/>
           <a:lstStyle/>
           <a:p>
-            <a:pPr marL="0" indent="0">
+            <a:pPr indent="0" marL="0">
               <a:lnSpc>
                 <a:spcPct val="115000"/>
               </a:lnSpc>
@@ -7587,7 +7754,7 @@
             <a:endParaRPr lang="en-US" sz="1500" dirty="0"/>
           </a:p>
           <a:p>
-            <a:pPr marL="0" indent="0">
+            <a:pPr indent="0" marL="0">
               <a:lnSpc>
                 <a:spcPct val="115000"/>
               </a:lnSpc>
@@ -7629,7 +7796,7 @@
           <a:bodyPr wrap="square" lIns="0" tIns="0" rIns="0" bIns="0" rtlCol="0" anchor="ctr"/>
           <a:lstStyle/>
           <a:p>
-            <a:pPr marL="0" indent="0">
+            <a:pPr indent="0" marL="0">
               <a:lnSpc>
                 <a:spcPct val="110000"/>
               </a:lnSpc>
@@ -7649,7 +7816,7 @@
             <a:endParaRPr lang="en-US" sz="1300" dirty="0"/>
           </a:p>
           <a:p>
-            <a:pPr marL="0" indent="0">
+            <a:pPr indent="0" marL="0">
               <a:lnSpc>
                 <a:spcPct val="110000"/>
               </a:lnSpc>
@@ -7696,13 +7863,6 @@
             <a:prstDash val="solid"/>
           </a:ln>
         </p:spPr>
-        <p:txBody>
-          <a:bodyPr/>
-          <a:lstStyle/>
-          <a:p>
-            <a:endParaRPr lang="en-US"/>
-          </a:p>
-        </p:txBody>
       </p:sp>
       <p:sp>
         <p:nvSpPr>
@@ -7725,7 +7885,7 @@
           <a:bodyPr wrap="square" lIns="0" tIns="0" rIns="0" bIns="0" rtlCol="0" anchor="ctr"/>
           <a:lstStyle/>
           <a:p>
-            <a:pPr marL="0" indent="0">
+            <a:pPr indent="0" marL="0">
               <a:lnSpc>
                 <a:spcPct val="115000"/>
               </a:lnSpc>
@@ -7745,7 +7905,7 @@
             <a:endParaRPr lang="en-US" sz="1500" dirty="0"/>
           </a:p>
           <a:p>
-            <a:pPr marL="0" indent="0">
+            <a:pPr indent="0" marL="0">
               <a:lnSpc>
                 <a:spcPct val="115000"/>
               </a:lnSpc>
@@ -7787,7 +7947,7 @@
           <a:bodyPr wrap="square" lIns="0" tIns="0" rIns="0" bIns="0" rtlCol="0" anchor="ctr"/>
           <a:lstStyle/>
           <a:p>
-            <a:pPr marL="0" indent="0">
+            <a:pPr indent="0" marL="0">
               <a:lnSpc>
                 <a:spcPct val="110000"/>
               </a:lnSpc>
@@ -7807,7 +7967,7 @@
             <a:endParaRPr lang="en-US" sz="1300" dirty="0"/>
           </a:p>
           <a:p>
-            <a:pPr marL="0" indent="0">
+            <a:pPr indent="0" marL="0">
               <a:lnSpc>
                 <a:spcPct val="110000"/>
               </a:lnSpc>
@@ -7854,13 +8014,6 @@
             <a:prstDash val="solid"/>
           </a:ln>
         </p:spPr>
-        <p:txBody>
-          <a:bodyPr/>
-          <a:lstStyle/>
-          <a:p>
-            <a:endParaRPr lang="en-US"/>
-          </a:p>
-        </p:txBody>
       </p:sp>
       <p:sp>
         <p:nvSpPr>
@@ -7883,7 +8036,7 @@
           <a:bodyPr wrap="square" lIns="0" tIns="0" rIns="0" bIns="0" rtlCol="0" anchor="ctr"/>
           <a:lstStyle/>
           <a:p>
-            <a:pPr marL="0" indent="0">
+            <a:pPr indent="0" marL="0">
               <a:lnSpc>
                 <a:spcPct val="115000"/>
               </a:lnSpc>
@@ -7903,7 +8056,7 @@
             <a:endParaRPr lang="en-US" sz="1500" dirty="0"/>
           </a:p>
           <a:p>
-            <a:pPr marL="0" indent="0">
+            <a:pPr indent="0" marL="0">
               <a:lnSpc>
                 <a:spcPct val="115000"/>
               </a:lnSpc>
@@ -7945,7 +8098,7 @@
           <a:bodyPr wrap="square" lIns="0" tIns="0" rIns="0" bIns="0" rtlCol="0" anchor="ctr"/>
           <a:lstStyle/>
           <a:p>
-            <a:pPr marL="0" indent="0">
+            <a:pPr indent="0" marL="0">
               <a:lnSpc>
                 <a:spcPct val="110000"/>
               </a:lnSpc>
@@ -7965,7 +8118,7 @@
             <a:endParaRPr lang="en-US" sz="1300" dirty="0"/>
           </a:p>
           <a:p>
-            <a:pPr marL="0" indent="0">
+            <a:pPr indent="0" marL="0">
               <a:lnSpc>
                 <a:spcPct val="110000"/>
               </a:lnSpc>
@@ -8007,7 +8160,7 @@
           <a:bodyPr wrap="square" lIns="0" tIns="0" rIns="0" bIns="0" rtlCol="0" anchor="ctr"/>
           <a:lstStyle/>
           <a:p>
-            <a:pPr marL="0" indent="0">
+            <a:pPr indent="0" marL="0">
               <a:buNone/>
             </a:pPr>
             <a:r>
@@ -8046,7 +8199,7 @@
           <a:bodyPr wrap="square" lIns="0" tIns="0" rIns="0" bIns="0" rtlCol="0" anchor="ctr"/>
           <a:lstStyle/>
           <a:p>
-            <a:pPr marL="0" indent="0" algn="r">
+            <a:pPr algn="r" indent="0" marL="0">
               <a:buNone/>
             </a:pPr>
             <a:r>
@@ -8080,7 +8233,6 @@
         <a:solidFill>
           <a:srgbClr val="FFFFFF"/>
         </a:solidFill>
-        <a:effectLst/>
       </p:bgPr>
     </p:bg>
     <p:spTree>
@@ -8118,11 +8270,11 @@
           <a:bodyPr wrap="square" lIns="0" tIns="0" rIns="0" bIns="0" rtlCol="0" anchor="ctr"/>
           <a:lstStyle/>
           <a:p>
-            <a:pPr marL="0" indent="0" algn="l">
-              <a:buNone/>
-            </a:pPr>
-            <a:r>
-              <a:rPr lang="en-US" sz="1300" b="1" kern="0" spc="300" dirty="0">
+            <a:pPr algn="l" indent="0" marL="0">
+              <a:buNone/>
+            </a:pPr>
+            <a:r>
+              <a:rPr lang="en-US" sz="1300" b="1" spc="300" kern="0" dirty="0">
                 <a:solidFill>
                   <a:srgbClr val="8A6C1E"/>
                 </a:solidFill>
@@ -8157,7 +8309,7 @@
           <a:bodyPr wrap="square" lIns="0" tIns="0" rIns="0" bIns="0" rtlCol="0" anchor="ctr"/>
           <a:lstStyle/>
           <a:p>
-            <a:pPr marL="0" indent="0" algn="l">
+            <a:pPr algn="l" indent="0" marL="0">
               <a:buNone/>
             </a:pPr>
             <a:r>
@@ -8196,7 +8348,7 @@
           <a:bodyPr wrap="square" lIns="0" tIns="0" rIns="0" bIns="0" rtlCol="0" anchor="ctr"/>
           <a:lstStyle/>
           <a:p>
-            <a:pPr marL="0" indent="0">
+            <a:pPr indent="0" marL="0">
               <a:buNone/>
             </a:pPr>
             <a:r>
@@ -8233,17 +8385,222 @@
           </a:solidFill>
           <a:ln/>
         </p:spPr>
-        <p:txBody>
-          <a:bodyPr/>
-          <a:lstStyle/>
-          <a:p>
-            <a:endParaRPr lang="en-US"/>
-          </a:p>
-        </p:txBody>
       </p:sp>
       <p:pic>
         <p:nvPicPr>
-          <p:cNvPr id="6" name="Image 0" descr="/home/claude/tarot-deck/icons/check-gold.png"/>
+          <p:cNvPr id="6" name="Image 0" descr="/home/claude/tarot-deck/icons/check-gold.png">    </p:cNvPr>
+          <p:cNvPicPr>
+            <a:picLocks noChangeAspect="1"/>
+          </p:cNvPicPr>
+          <p:nvPr/>
+        </p:nvPicPr>
+        <p:blipFill>
+          <a:blip r:embed="rId1"/>
+          <a:stretch>
+            <a:fillRect/>
+          </a:stretch>
+        </p:blipFill>
+        <p:spPr>
+          <a:xfrm>
+            <a:off x="768096" y="2478024"/>
+            <a:ext cx="256032" cy="256032"/>
+          </a:xfrm>
+          <a:prstGeom prst="rect">
+            <a:avLst/>
+          </a:prstGeom>
+        </p:spPr>
+      </p:pic>
+      <p:sp>
+        <p:nvSpPr>
+          <p:cNvPr id="7" name="Text 4"/>
+          <p:cNvSpPr txBox="1"/>
+          <p:nvPr/>
+        </p:nvSpPr>
+        <p:spPr>
+          <a:xfrm>
+            <a:off x="1371600" y="2331720"/>
+            <a:ext cx="4572000" cy="914400"/>
+          </a:xfrm>
+          <a:prstGeom prst="rect">
+            <a:avLst/>
+          </a:prstGeom>
+          <a:noFill/>
+          <a:ln/>
+        </p:spPr>
+        <p:txBody>
+          <a:bodyPr wrap="square" lIns="0" tIns="0" rIns="0" bIns="0" rtlCol="0" anchor="t"/>
+          <a:lstStyle/>
+          <a:p>
+            <a:pPr algn="l" indent="0" marL="0">
+              <a:lnSpc>
+                <a:spcPct val="110000"/>
+              </a:lnSpc>
+              <a:buNone/>
+            </a:pPr>
+            <a:r>
+              <a:rPr lang="en-US" sz="1700" b="1" dirty="0">
+                <a:solidFill>
+                  <a:srgbClr val="2B2545"/>
+                </a:solidFill>
+                <a:latin typeface="Calibri" pitchFamily="34" charset="0"/>
+                <a:ea typeface="Calibri" pitchFamily="34" charset="-122"/>
+                <a:cs typeface="Calibri" pitchFamily="34" charset="-120"/>
+              </a:rPr>
+              <a:t>Everyday topics</a:t>
+            </a:r>
+            <a:endParaRPr lang="en-US" sz="1700" dirty="0"/>
+          </a:p>
+          <a:p>
+            <a:pPr algn="l" indent="0" marL="0">
+              <a:lnSpc>
+                <a:spcPct val="110000"/>
+              </a:lnSpc>
+              <a:buNone/>
+            </a:pPr>
+            <a:r>
+              <a:rPr lang="en-US" sz="1400" dirty="0">
+                <a:solidFill>
+                  <a:srgbClr val="5E5678"/>
+                </a:solidFill>
+                <a:latin typeface="Calibri" pitchFamily="34" charset="0"/>
+                <a:ea typeface="Calibri" pitchFamily="34" charset="-122"/>
+                <a:cs typeface="Calibri" pitchFamily="34" charset="-120"/>
+              </a:rPr>
+              <a:t>A normal, reflective reading. No predictions, ever.</a:t>
+            </a:r>
+            <a:endParaRPr lang="en-US" sz="1700" dirty="0"/>
+          </a:p>
+        </p:txBody>
+      </p:sp>
+      <p:sp>
+        <p:nvSpPr>
+          <p:cNvPr id="8" name="Shape 5"/>
+          <p:cNvSpPr/>
+          <p:nvPr/>
+        </p:nvSpPr>
+        <p:spPr>
+          <a:xfrm>
+            <a:off x="640080" y="3383280"/>
+            <a:ext cx="512064" cy="512064"/>
+          </a:xfrm>
+          <a:prstGeom prst="ellipse">
+            <a:avLst/>
+          </a:prstGeom>
+          <a:solidFill>
+            <a:srgbClr val="231C40"/>
+          </a:solidFill>
+          <a:ln/>
+        </p:spPr>
+      </p:sp>
+      <p:pic>
+        <p:nvPicPr>
+          <p:cNvPr id="9" name="Image 1" descr="/home/claude/tarot-deck/icons/alert-gold.png">    </p:cNvPr>
+          <p:cNvPicPr>
+            <a:picLocks noChangeAspect="1"/>
+          </p:cNvPicPr>
+          <p:nvPr/>
+        </p:nvPicPr>
+        <p:blipFill>
+          <a:blip r:embed="rId2"/>
+          <a:stretch>
+            <a:fillRect/>
+          </a:stretch>
+        </p:blipFill>
+        <p:spPr>
+          <a:xfrm>
+            <a:off x="768096" y="3511296"/>
+            <a:ext cx="256032" cy="256032"/>
+          </a:xfrm>
+          <a:prstGeom prst="rect">
+            <a:avLst/>
+          </a:prstGeom>
+        </p:spPr>
+      </p:pic>
+      <p:sp>
+        <p:nvSpPr>
+          <p:cNvPr id="10" name="Text 6"/>
+          <p:cNvSpPr txBox="1"/>
+          <p:nvPr/>
+        </p:nvSpPr>
+        <p:spPr>
+          <a:xfrm>
+            <a:off x="1371600" y="3364992"/>
+            <a:ext cx="4572000" cy="914400"/>
+          </a:xfrm>
+          <a:prstGeom prst="rect">
+            <a:avLst/>
+          </a:prstGeom>
+          <a:noFill/>
+          <a:ln/>
+        </p:spPr>
+        <p:txBody>
+          <a:bodyPr wrap="square" lIns="0" tIns="0" rIns="0" bIns="0" rtlCol="0" anchor="t"/>
+          <a:lstStyle/>
+          <a:p>
+            <a:pPr algn="l" indent="0" marL="0">
+              <a:lnSpc>
+                <a:spcPct val="110000"/>
+              </a:lnSpc>
+              <a:buNone/>
+            </a:pPr>
+            <a:r>
+              <a:rPr lang="en-US" sz="1700" b="1" dirty="0">
+                <a:solidFill>
+                  <a:srgbClr val="2B2545"/>
+                </a:solidFill>
+                <a:latin typeface="Calibri" pitchFamily="34" charset="0"/>
+                <a:ea typeface="Calibri" pitchFamily="34" charset="-122"/>
+                <a:cs typeface="Calibri" pitchFamily="34" charset="-120"/>
+              </a:rPr>
+              <a:t>Serious topics</a:t>
+            </a:r>
+            <a:endParaRPr lang="en-US" sz="1700" dirty="0"/>
+          </a:p>
+          <a:p>
+            <a:pPr algn="l" indent="0" marL="0">
+              <a:lnSpc>
+                <a:spcPct val="110000"/>
+              </a:lnSpc>
+              <a:buNone/>
+            </a:pPr>
+            <a:r>
+              <a:rPr lang="en-US" sz="1400" dirty="0">
+                <a:solidFill>
+                  <a:srgbClr val="5E5678"/>
+                </a:solidFill>
+                <a:latin typeface="Calibri" pitchFamily="34" charset="0"/>
+                <a:ea typeface="Calibri" pitchFamily="34" charset="-122"/>
+                <a:cs typeface="Calibri" pitchFamily="34" charset="-120"/>
+              </a:rPr>
+              <a:t>Medical, legal, money: it says this needs a professional.</a:t>
+            </a:r>
+            <a:endParaRPr lang="en-US" sz="1700" dirty="0"/>
+          </a:p>
+        </p:txBody>
+      </p:sp>
+      <p:sp>
+        <p:nvSpPr>
+          <p:cNvPr id="11" name="Shape 7"/>
+          <p:cNvSpPr/>
+          <p:nvPr/>
+        </p:nvSpPr>
+        <p:spPr>
+          <a:xfrm>
+            <a:off x="640080" y="4416552"/>
+            <a:ext cx="512064" cy="512064"/>
+          </a:xfrm>
+          <a:prstGeom prst="ellipse">
+            <a:avLst/>
+          </a:prstGeom>
+          <a:solidFill>
+            <a:srgbClr val="231C40"/>
+          </a:solidFill>
+          <a:ln/>
+        </p:spPr>
+      </p:sp>
+      <p:pic>
+        <p:nvPicPr>
+          <p:cNvPr id="12" name="Image 2" descr="/home/claude/tarot-deck/icons/shield-gold.png">    </p:cNvPr>
           <p:cNvPicPr>
             <a:picLocks noChangeAspect="1"/>
           </p:cNvPicPr>
@@ -8257,7 +8614,7 @@
         </p:blipFill>
         <p:spPr>
           <a:xfrm>
-            <a:off x="768096" y="2478024"/>
+            <a:off x="768096" y="4544568"/>
             <a:ext cx="256032" cy="256032"/>
           </a:xfrm>
           <a:prstGeom prst="rect">
@@ -8267,13 +8624,13 @@
       </p:pic>
       <p:sp>
         <p:nvSpPr>
-          <p:cNvPr id="7" name="Text 4"/>
-          <p:cNvSpPr txBox="1"/>
-          <p:nvPr/>
-        </p:nvSpPr>
-        <p:spPr>
-          <a:xfrm>
-            <a:off x="1371600" y="2331720"/>
+          <p:cNvPr id="13" name="Text 8"/>
+          <p:cNvSpPr txBox="1"/>
+          <p:nvPr/>
+        </p:nvSpPr>
+        <p:spPr>
+          <a:xfrm>
+            <a:off x="1371600" y="4398264"/>
             <a:ext cx="4572000" cy="914400"/>
           </a:xfrm>
           <a:prstGeom prst="rect">
@@ -8286,7 +8643,7 @@
           <a:bodyPr wrap="square" lIns="0" tIns="0" rIns="0" bIns="0" rtlCol="0" anchor="t"/>
           <a:lstStyle/>
           <a:p>
-            <a:pPr marL="0" indent="0" algn="l">
+            <a:pPr algn="l" indent="0" marL="0">
               <a:lnSpc>
                 <a:spcPct val="110000"/>
               </a:lnSpc>
@@ -8301,12 +8658,12 @@
                 <a:ea typeface="Calibri" pitchFamily="34" charset="-122"/>
                 <a:cs typeface="Calibri" pitchFamily="34" charset="-120"/>
               </a:rPr>
-              <a:t>Everyday topics</a:t>
+              <a:t>Crisis: the tarot voice stops</a:t>
             </a:r>
             <a:endParaRPr lang="en-US" sz="1700" dirty="0"/>
           </a:p>
           <a:p>
-            <a:pPr marL="0" indent="0" algn="l">
+            <a:pPr algn="l" indent="0" marL="0">
               <a:lnSpc>
                 <a:spcPct val="110000"/>
               </a:lnSpc>
@@ -8321,7 +8678,7 @@
                 <a:ea typeface="Calibri" pitchFamily="34" charset="-122"/>
                 <a:cs typeface="Calibri" pitchFamily="34" charset="-120"/>
               </a:rPr>
-              <a:t>A normal, reflective reading. No predictions, ever.</a:t>
+              <a:t>It answers plainly and points to real help, from turn one.</a:t>
             </a:r>
             <a:endParaRPr lang="en-US" sz="1700" dirty="0"/>
           </a:p>
@@ -8329,13 +8686,13 @@
       </p:sp>
       <p:sp>
         <p:nvSpPr>
-          <p:cNvPr id="8" name="Shape 5"/>
+          <p:cNvPr id="14" name="Shape 9"/>
           <p:cNvSpPr/>
           <p:nvPr/>
         </p:nvSpPr>
         <p:spPr>
           <a:xfrm>
-            <a:off x="640080" y="3383280"/>
+            <a:off x="640080" y="5449824"/>
             <a:ext cx="512064" cy="512064"/>
           </a:xfrm>
           <a:prstGeom prst="ellipse">
@@ -8346,17 +8703,10 @@
           </a:solidFill>
           <a:ln/>
         </p:spPr>
-        <p:txBody>
-          <a:bodyPr/>
-          <a:lstStyle/>
-          <a:p>
-            <a:endParaRPr lang="en-US"/>
-          </a:p>
-        </p:txBody>
       </p:sp>
       <p:pic>
         <p:nvPicPr>
-          <p:cNvPr id="9" name="Image 1" descr="/home/claude/tarot-deck/icons/alert-gold.png"/>
+          <p:cNvPr id="15" name="Image 3" descr="/home/claude/tarot-deck/icons/message-gold.png">    </p:cNvPr>
           <p:cNvPicPr>
             <a:picLocks noChangeAspect="1"/>
           </p:cNvPicPr>
@@ -8370,7 +8720,7 @@
         </p:blipFill>
         <p:spPr>
           <a:xfrm>
-            <a:off x="768096" y="3511296"/>
+            <a:off x="768096" y="5577840"/>
             <a:ext cx="256032" cy="256032"/>
           </a:xfrm>
           <a:prstGeom prst="rect">
@@ -8380,13 +8730,13 @@
       </p:pic>
       <p:sp>
         <p:nvSpPr>
-          <p:cNvPr id="10" name="Text 6"/>
-          <p:cNvSpPr txBox="1"/>
-          <p:nvPr/>
-        </p:nvSpPr>
-        <p:spPr>
-          <a:xfrm>
-            <a:off x="1371600" y="3364992"/>
+          <p:cNvPr id="16" name="Text 10"/>
+          <p:cNvSpPr txBox="1"/>
+          <p:nvPr/>
+        </p:nvSpPr>
+        <p:spPr>
+          <a:xfrm>
+            <a:off x="1371600" y="5431536"/>
             <a:ext cx="4572000" cy="914400"/>
           </a:xfrm>
           <a:prstGeom prst="rect">
@@ -8399,7 +8749,7 @@
           <a:bodyPr wrap="square" lIns="0" tIns="0" rIns="0" bIns="0" rtlCol="0" anchor="t"/>
           <a:lstStyle/>
           <a:p>
-            <a:pPr marL="0" indent="0" algn="l">
+            <a:pPr algn="l" indent="0" marL="0">
               <a:lnSpc>
                 <a:spcPct val="110000"/>
               </a:lnSpc>
@@ -8414,12 +8764,12 @@
                 <a:ea typeface="Calibri" pitchFamily="34" charset="-122"/>
                 <a:cs typeface="Calibri" pitchFamily="34" charset="-120"/>
               </a:rPr>
-              <a:t>Serious topics</a:t>
+              <a:t>“That's not it” always wins</a:t>
             </a:r>
             <a:endParaRPr lang="en-US" sz="1700" dirty="0"/>
           </a:p>
           <a:p>
-            <a:pPr marL="0" indent="0" algn="l">
+            <a:pPr algn="l" indent="0" marL="0">
               <a:lnSpc>
                 <a:spcPct val="110000"/>
               </a:lnSpc>
@@ -8434,7 +8784,7 @@
                 <a:ea typeface="Calibri" pitchFamily="34" charset="-122"/>
                 <a:cs typeface="Calibri" pitchFamily="34" charset="-120"/>
               </a:rPr>
-              <a:t>Medical, legal, money: it says this needs a professional.</a:t>
+              <a:t>Push back and it updates. Disagreement is never “resistance.”</a:t>
             </a:r>
             <a:endParaRPr lang="en-US" sz="1700" dirty="0"/>
           </a:p>
@@ -8442,13 +8792,52 @@
       </p:sp>
       <p:sp>
         <p:nvSpPr>
-          <p:cNvPr id="11" name="Shape 7"/>
+          <p:cNvPr id="17" name="Text 11"/>
+          <p:cNvSpPr txBox="1"/>
+          <p:nvPr/>
+        </p:nvSpPr>
+        <p:spPr>
+          <a:xfrm>
+            <a:off x="6400800" y="1783080"/>
+            <a:ext cx="5120640" cy="411480"/>
+          </a:xfrm>
+          <a:prstGeom prst="rect">
+            <a:avLst/>
+          </a:prstGeom>
+          <a:noFill/>
+          <a:ln/>
+        </p:spPr>
+        <p:txBody>
+          <a:bodyPr wrap="square" lIns="0" tIns="0" rIns="0" bIns="0" rtlCol="0" anchor="ctr"/>
+          <a:lstStyle/>
+          <a:p>
+            <a:pPr indent="0" marL="0">
+              <a:buNone/>
+            </a:pPr>
+            <a:r>
+              <a:rPr lang="en-US" sz="1800" b="1" dirty="0">
+                <a:solidFill>
+                  <a:srgbClr val="8A6C1E"/>
+                </a:solidFill>
+                <a:latin typeface="Calibri" pitchFamily="34" charset="0"/>
+                <a:ea typeface="Calibri" pitchFamily="34" charset="-122"/>
+                <a:cs typeface="Calibri" pitchFamily="34" charset="-120"/>
+              </a:rPr>
+              <a:t>Your key, your choice of path</a:t>
+            </a:r>
+            <a:endParaRPr lang="en-US" sz="1800" dirty="0"/>
+          </a:p>
+        </p:txBody>
+      </p:sp>
+      <p:sp>
+        <p:nvSpPr>
+          <p:cNvPr id="18" name="Shape 12"/>
           <p:cNvSpPr/>
           <p:nvPr/>
         </p:nvSpPr>
         <p:spPr>
           <a:xfrm>
-            <a:off x="640080" y="4416552"/>
+            <a:off x="6400800" y="2350008"/>
             <a:ext cx="512064" cy="512064"/>
           </a:xfrm>
           <a:prstGeom prst="ellipse">
@@ -8459,17 +8848,10 @@
           </a:solidFill>
           <a:ln/>
         </p:spPr>
-        <p:txBody>
-          <a:bodyPr/>
-          <a:lstStyle/>
-          <a:p>
-            <a:endParaRPr lang="en-US"/>
-          </a:p>
-        </p:txBody>
       </p:sp>
       <p:pic>
         <p:nvPicPr>
-          <p:cNvPr id="12" name="Image 2" descr="/home/claude/tarot-deck/icons/shield-gold.png"/>
+          <p:cNvPr id="19" name="Image 4" descr="/home/claude/tarot-deck/icons/zap-gold.png">    </p:cNvPr>
           <p:cNvPicPr>
             <a:picLocks noChangeAspect="1"/>
           </p:cNvPicPr>
@@ -8483,7 +8865,7 @@
         </p:blipFill>
         <p:spPr>
           <a:xfrm>
-            <a:off x="768096" y="4544568"/>
+            <a:off x="6528816" y="2478024"/>
             <a:ext cx="256032" cy="256032"/>
           </a:xfrm>
           <a:prstGeom prst="rect">
@@ -8493,14 +8875,14 @@
       </p:pic>
       <p:sp>
         <p:nvSpPr>
-          <p:cNvPr id="13" name="Text 8"/>
-          <p:cNvSpPr txBox="1"/>
-          <p:nvPr/>
-        </p:nvSpPr>
-        <p:spPr>
-          <a:xfrm>
-            <a:off x="1371600" y="4398264"/>
-            <a:ext cx="4572000" cy="914400"/>
+          <p:cNvPr id="20" name="Text 13"/>
+          <p:cNvSpPr txBox="1"/>
+          <p:nvPr/>
+        </p:nvSpPr>
+        <p:spPr>
+          <a:xfrm>
+            <a:off x="7132320" y="2331720"/>
+            <a:ext cx="4389120" cy="914400"/>
           </a:xfrm>
           <a:prstGeom prst="rect">
             <a:avLst/>
@@ -8512,7 +8894,7 @@
           <a:bodyPr wrap="square" lIns="0" tIns="0" rIns="0" bIns="0" rtlCol="0" anchor="t"/>
           <a:lstStyle/>
           <a:p>
-            <a:pPr marL="0" indent="0" algn="l">
+            <a:pPr algn="l" indent="0" marL="0">
               <a:lnSpc>
                 <a:spcPct val="110000"/>
               </a:lnSpc>
@@ -8527,12 +8909,12 @@
                 <a:ea typeface="Calibri" pitchFamily="34" charset="-122"/>
                 <a:cs typeface="Calibri" pitchFamily="34" charset="-120"/>
               </a:rPr>
-              <a:t>Crisis: the tarot voice stops</a:t>
+              <a:t>Direct</a:t>
             </a:r>
             <a:endParaRPr lang="en-US" sz="1700" dirty="0"/>
           </a:p>
           <a:p>
-            <a:pPr marL="0" indent="0" algn="l">
+            <a:pPr algn="l" indent="0" marL="0">
               <a:lnSpc>
                 <a:spcPct val="110000"/>
               </a:lnSpc>
@@ -8547,7 +8929,7 @@
                 <a:ea typeface="Calibri" pitchFamily="34" charset="-122"/>
                 <a:cs typeface="Calibri" pitchFamily="34" charset="-120"/>
               </a:rPr>
-              <a:t>It answers plainly and points to real help, from turn one.</a:t>
+              <a:t>Your browser talks straight to the AI provider.</a:t>
             </a:r>
             <a:endParaRPr lang="en-US" sz="1700" dirty="0"/>
           </a:p>
@@ -8555,13 +8937,13 @@
       </p:sp>
       <p:sp>
         <p:nvSpPr>
-          <p:cNvPr id="14" name="Shape 9"/>
+          <p:cNvPr id="21" name="Shape 14"/>
           <p:cNvSpPr/>
           <p:nvPr/>
         </p:nvSpPr>
         <p:spPr>
           <a:xfrm>
-            <a:off x="640080" y="5449824"/>
+            <a:off x="6400800" y="3383280"/>
             <a:ext cx="512064" cy="512064"/>
           </a:xfrm>
           <a:prstGeom prst="ellipse">
@@ -8572,17 +8954,10 @@
           </a:solidFill>
           <a:ln/>
         </p:spPr>
-        <p:txBody>
-          <a:bodyPr/>
-          <a:lstStyle/>
-          <a:p>
-            <a:endParaRPr lang="en-US"/>
-          </a:p>
-        </p:txBody>
       </p:sp>
       <p:pic>
         <p:nvPicPr>
-          <p:cNvPr id="15" name="Image 3" descr="/home/claude/tarot-deck/icons/message-gold.png"/>
+          <p:cNvPr id="22" name="Image 5" descr="/home/claude/tarot-deck/icons/git-gold.png">    </p:cNvPr>
           <p:cNvPicPr>
             <a:picLocks noChangeAspect="1"/>
           </p:cNvPicPr>
@@ -8596,7 +8971,7 @@
         </p:blipFill>
         <p:spPr>
           <a:xfrm>
-            <a:off x="768096" y="5577840"/>
+            <a:off x="6528816" y="3511296"/>
             <a:ext cx="256032" cy="256032"/>
           </a:xfrm>
           <a:prstGeom prst="rect">
@@ -8606,14 +8981,14 @@
       </p:pic>
       <p:sp>
         <p:nvSpPr>
-          <p:cNvPr id="16" name="Text 10"/>
-          <p:cNvSpPr txBox="1"/>
-          <p:nvPr/>
-        </p:nvSpPr>
-        <p:spPr>
-          <a:xfrm>
-            <a:off x="1371600" y="5431536"/>
-            <a:ext cx="4572000" cy="914400"/>
+          <p:cNvPr id="23" name="Text 15"/>
+          <p:cNvSpPr txBox="1"/>
+          <p:nvPr/>
+        </p:nvSpPr>
+        <p:spPr>
+          <a:xfrm>
+            <a:off x="7132320" y="3364992"/>
+            <a:ext cx="4389120" cy="914400"/>
           </a:xfrm>
           <a:prstGeom prst="rect">
             <a:avLst/>
@@ -8625,7 +9000,7 @@
           <a:bodyPr wrap="square" lIns="0" tIns="0" rIns="0" bIns="0" rtlCol="0" anchor="t"/>
           <a:lstStyle/>
           <a:p>
-            <a:pPr marL="0" indent="0" algn="l">
+            <a:pPr algn="l" indent="0" marL="0">
               <a:lnSpc>
                 <a:spcPct val="110000"/>
               </a:lnSpc>
@@ -8640,12 +9015,12 @@
                 <a:ea typeface="Calibri" pitchFamily="34" charset="-122"/>
                 <a:cs typeface="Calibri" pitchFamily="34" charset="-120"/>
               </a:rPr>
-              <a:t>“That's not it” always wins</a:t>
+              <a:t>Your own relay</a:t>
             </a:r>
             <a:endParaRPr lang="en-US" sz="1700" dirty="0"/>
           </a:p>
           <a:p>
-            <a:pPr marL="0" indent="0" algn="l">
+            <a:pPr algn="l" indent="0" marL="0">
               <a:lnSpc>
                 <a:spcPct val="110000"/>
               </a:lnSpc>
@@ -8660,7 +9035,7 @@
                 <a:ea typeface="Calibri" pitchFamily="34" charset="-122"/>
                 <a:cs typeface="Calibri" pitchFamily="34" charset="-120"/>
               </a:rPr>
-              <a:t>Push back and it updates. Disagreement is never “resistance.”</a:t>
+              <a:t>~300 lines of Python you can read in one sitting.</a:t>
             </a:r>
             <a:endParaRPr lang="en-US" sz="1700" dirty="0"/>
           </a:p>
@@ -8668,52 +9043,13 @@
       </p:sp>
       <p:sp>
         <p:nvSpPr>
-          <p:cNvPr id="17" name="Text 11"/>
-          <p:cNvSpPr txBox="1"/>
-          <p:nvPr/>
-        </p:nvSpPr>
-        <p:spPr>
-          <a:xfrm>
-            <a:off x="6400800" y="1783080"/>
-            <a:ext cx="5120640" cy="411480"/>
-          </a:xfrm>
-          <a:prstGeom prst="rect">
-            <a:avLst/>
-          </a:prstGeom>
-          <a:noFill/>
-          <a:ln/>
-        </p:spPr>
-        <p:txBody>
-          <a:bodyPr wrap="square" lIns="0" tIns="0" rIns="0" bIns="0" rtlCol="0" anchor="ctr"/>
-          <a:lstStyle/>
-          <a:p>
-            <a:pPr marL="0" indent="0">
-              <a:buNone/>
-            </a:pPr>
-            <a:r>
-              <a:rPr lang="en-US" sz="1800" b="1" dirty="0">
-                <a:solidFill>
-                  <a:srgbClr val="8A6C1E"/>
-                </a:solidFill>
-                <a:latin typeface="Calibri" pitchFamily="34" charset="0"/>
-                <a:ea typeface="Calibri" pitchFamily="34" charset="-122"/>
-                <a:cs typeface="Calibri" pitchFamily="34" charset="-120"/>
-              </a:rPr>
-              <a:t>Your key, your choice of path</a:t>
-            </a:r>
-            <a:endParaRPr lang="en-US" sz="1800" dirty="0"/>
-          </a:p>
-        </p:txBody>
-      </p:sp>
-      <p:sp>
-        <p:nvSpPr>
-          <p:cNvPr id="18" name="Shape 12"/>
+          <p:cNvPr id="24" name="Shape 16"/>
           <p:cNvSpPr/>
           <p:nvPr/>
         </p:nvSpPr>
         <p:spPr>
           <a:xfrm>
-            <a:off x="6400800" y="2350008"/>
+            <a:off x="6400800" y="4416552"/>
             <a:ext cx="512064" cy="512064"/>
           </a:xfrm>
           <a:prstGeom prst="ellipse">
@@ -8724,17 +9060,10 @@
           </a:solidFill>
           <a:ln/>
         </p:spPr>
-        <p:txBody>
-          <a:bodyPr/>
-          <a:lstStyle/>
-          <a:p>
-            <a:endParaRPr lang="en-US"/>
-          </a:p>
-        </p:txBody>
       </p:sp>
       <p:pic>
         <p:nvPicPr>
-          <p:cNvPr id="19" name="Image 4" descr="/home/claude/tarot-deck/icons/zap-gold.png"/>
+          <p:cNvPr id="25" name="Image 6" descr="/home/claude/tarot-deck/icons/lock-gold.png">    </p:cNvPr>
           <p:cNvPicPr>
             <a:picLocks noChangeAspect="1"/>
           </p:cNvPicPr>
@@ -8748,7 +9077,7 @@
         </p:blipFill>
         <p:spPr>
           <a:xfrm>
-            <a:off x="6528816" y="2478024"/>
+            <a:off x="6528816" y="4544568"/>
             <a:ext cx="256032" cy="256032"/>
           </a:xfrm>
           <a:prstGeom prst="rect">
@@ -8758,13 +9087,13 @@
       </p:pic>
       <p:sp>
         <p:nvSpPr>
-          <p:cNvPr id="20" name="Text 13"/>
-          <p:cNvSpPr txBox="1"/>
-          <p:nvPr/>
-        </p:nvSpPr>
-        <p:spPr>
-          <a:xfrm>
-            <a:off x="7132320" y="2331720"/>
+          <p:cNvPr id="26" name="Text 17"/>
+          <p:cNvSpPr txBox="1"/>
+          <p:nvPr/>
+        </p:nvSpPr>
+        <p:spPr>
+          <a:xfrm>
+            <a:off x="7132320" y="4398264"/>
             <a:ext cx="4389120" cy="914400"/>
           </a:xfrm>
           <a:prstGeom prst="rect">
@@ -8777,7 +9106,7 @@
           <a:bodyPr wrap="square" lIns="0" tIns="0" rIns="0" bIns="0" rtlCol="0" anchor="t"/>
           <a:lstStyle/>
           <a:p>
-            <a:pPr marL="0" indent="0" algn="l">
+            <a:pPr algn="l" indent="0" marL="0">
               <a:lnSpc>
                 <a:spcPct val="110000"/>
               </a:lnSpc>
@@ -8792,12 +9121,12 @@
                 <a:ea typeface="Calibri" pitchFamily="34" charset="-122"/>
                 <a:cs typeface="Calibri" pitchFamily="34" charset="-120"/>
               </a:rPr>
-              <a:t>Direct</a:t>
+              <a:t>Hosted</a:t>
             </a:r>
             <a:endParaRPr lang="en-US" sz="1700" dirty="0"/>
           </a:p>
           <a:p>
-            <a:pPr marL="0" indent="0" algn="l">
+            <a:pPr algn="l" indent="0" marL="0">
               <a:lnSpc>
                 <a:spcPct val="110000"/>
               </a:lnSpc>
@@ -8812,7 +9141,7 @@
                 <a:ea typeface="Calibri" pitchFamily="34" charset="-122"/>
                 <a:cs typeface="Calibri" pitchFamily="34" charset="-120"/>
               </a:rPr>
-              <a:t>Your browser talks straight to the AI provider.</a:t>
+              <a:t>Under 140 lines, with no code that could log you.</a:t>
             </a:r>
             <a:endParaRPr lang="en-US" sz="1700" dirty="0"/>
           </a:p>
@@ -8820,13 +9149,13 @@
       </p:sp>
       <p:sp>
         <p:nvSpPr>
-          <p:cNvPr id="21" name="Shape 14"/>
+          <p:cNvPr id="27" name="Shape 18"/>
           <p:cNvSpPr/>
           <p:nvPr/>
         </p:nvSpPr>
         <p:spPr>
           <a:xfrm>
-            <a:off x="6400800" y="3383280"/>
+            <a:off x="6400800" y="5449824"/>
             <a:ext cx="512064" cy="512064"/>
           </a:xfrm>
           <a:prstGeom prst="ellipse">
@@ -8837,17 +9166,10 @@
           </a:solidFill>
           <a:ln/>
         </p:spPr>
-        <p:txBody>
-          <a:bodyPr/>
-          <a:lstStyle/>
-          <a:p>
-            <a:endParaRPr lang="en-US"/>
-          </a:p>
-        </p:txBody>
       </p:sp>
       <p:pic>
         <p:nvPicPr>
-          <p:cNvPr id="22" name="Image 5" descr="/home/claude/tarot-deck/icons/git-gold.png"/>
+          <p:cNvPr id="28" name="Image 7" descr="/home/claude/tarot-deck/icons/key-gold.png">    </p:cNvPr>
           <p:cNvPicPr>
             <a:picLocks noChangeAspect="1"/>
           </p:cNvPicPr>
@@ -8861,7 +9183,7 @@
         </p:blipFill>
         <p:spPr>
           <a:xfrm>
-            <a:off x="6528816" y="3511296"/>
+            <a:off x="6528816" y="5577840"/>
             <a:ext cx="256032" cy="256032"/>
           </a:xfrm>
           <a:prstGeom prst="rect">
@@ -8871,13 +9193,13 @@
       </p:pic>
       <p:sp>
         <p:nvSpPr>
-          <p:cNvPr id="23" name="Text 15"/>
-          <p:cNvSpPr txBox="1"/>
-          <p:nvPr/>
-        </p:nvSpPr>
-        <p:spPr>
-          <a:xfrm>
-            <a:off x="7132320" y="3364992"/>
+          <p:cNvPr id="29" name="Text 19"/>
+          <p:cNvSpPr txBox="1"/>
+          <p:nvPr/>
+        </p:nvSpPr>
+        <p:spPr>
+          <a:xfrm>
+            <a:off x="7132320" y="5431536"/>
             <a:ext cx="4389120" cy="914400"/>
           </a:xfrm>
           <a:prstGeom prst="rect">
@@ -8890,7 +9212,7 @@
           <a:bodyPr wrap="square" lIns="0" tIns="0" rIns="0" bIns="0" rtlCol="0" anchor="t"/>
           <a:lstStyle/>
           <a:p>
-            <a:pPr marL="0" indent="0" algn="l">
+            <a:pPr algn="l" indent="0" marL="0">
               <a:lnSpc>
                 <a:spcPct val="110000"/>
               </a:lnSpc>
@@ -8905,12 +9227,12 @@
                 <a:ea typeface="Calibri" pitchFamily="34" charset="-122"/>
                 <a:cs typeface="Calibri" pitchFamily="34" charset="-120"/>
               </a:rPr>
-              <a:t>Your own relay</a:t>
+              <a:t>Tested, not promised</a:t>
             </a:r>
             <a:endParaRPr lang="en-US" sz="1700" dirty="0"/>
           </a:p>
           <a:p>
-            <a:pPr marL="0" indent="0" algn="l">
+            <a:pPr algn="l" indent="0" marL="0">
               <a:lnSpc>
                 <a:spcPct val="110000"/>
               </a:lnSpc>
@@ -8925,232 +9247,6 @@
                 <a:ea typeface="Calibri" pitchFamily="34" charset="-122"/>
                 <a:cs typeface="Calibri" pitchFamily="34" charset="-120"/>
               </a:rPr>
-              <a:t>~300 lines of Python you can read in one sitting.</a:t>
-            </a:r>
-            <a:endParaRPr lang="en-US" sz="1700" dirty="0"/>
-          </a:p>
-        </p:txBody>
-      </p:sp>
-      <p:sp>
-        <p:nvSpPr>
-          <p:cNvPr id="24" name="Shape 16"/>
-          <p:cNvSpPr/>
-          <p:nvPr/>
-        </p:nvSpPr>
-        <p:spPr>
-          <a:xfrm>
-            <a:off x="6400800" y="4416552"/>
-            <a:ext cx="512064" cy="512064"/>
-          </a:xfrm>
-          <a:prstGeom prst="ellipse">
-            <a:avLst/>
-          </a:prstGeom>
-          <a:solidFill>
-            <a:srgbClr val="231C40"/>
-          </a:solidFill>
-          <a:ln/>
-        </p:spPr>
-        <p:txBody>
-          <a:bodyPr/>
-          <a:lstStyle/>
-          <a:p>
-            <a:endParaRPr lang="en-US"/>
-          </a:p>
-        </p:txBody>
-      </p:sp>
-      <p:pic>
-        <p:nvPicPr>
-          <p:cNvPr id="25" name="Image 6" descr="/home/claude/tarot-deck/icons/lock-gold.png"/>
-          <p:cNvPicPr>
-            <a:picLocks noChangeAspect="1"/>
-          </p:cNvPicPr>
-          <p:nvPr/>
-        </p:nvPicPr>
-        <p:blipFill>
-          <a:blip r:embed="rId9"/>
-          <a:stretch>
-            <a:fillRect/>
-          </a:stretch>
-        </p:blipFill>
-        <p:spPr>
-          <a:xfrm>
-            <a:off x="6528816" y="4544568"/>
-            <a:ext cx="256032" cy="256032"/>
-          </a:xfrm>
-          <a:prstGeom prst="rect">
-            <a:avLst/>
-          </a:prstGeom>
-        </p:spPr>
-      </p:pic>
-      <p:sp>
-        <p:nvSpPr>
-          <p:cNvPr id="26" name="Text 17"/>
-          <p:cNvSpPr txBox="1"/>
-          <p:nvPr/>
-        </p:nvSpPr>
-        <p:spPr>
-          <a:xfrm>
-            <a:off x="7132320" y="4398264"/>
-            <a:ext cx="4389120" cy="914400"/>
-          </a:xfrm>
-          <a:prstGeom prst="rect">
-            <a:avLst/>
-          </a:prstGeom>
-          <a:noFill/>
-          <a:ln/>
-        </p:spPr>
-        <p:txBody>
-          <a:bodyPr wrap="square" lIns="0" tIns="0" rIns="0" bIns="0" rtlCol="0" anchor="t"/>
-          <a:lstStyle/>
-          <a:p>
-            <a:pPr marL="0" indent="0" algn="l">
-              <a:lnSpc>
-                <a:spcPct val="110000"/>
-              </a:lnSpc>
-              <a:buNone/>
-            </a:pPr>
-            <a:r>
-              <a:rPr lang="en-US" sz="1700" b="1" dirty="0">
-                <a:solidFill>
-                  <a:srgbClr val="2B2545"/>
-                </a:solidFill>
-                <a:latin typeface="Calibri" pitchFamily="34" charset="0"/>
-                <a:ea typeface="Calibri" pitchFamily="34" charset="-122"/>
-                <a:cs typeface="Calibri" pitchFamily="34" charset="-120"/>
-              </a:rPr>
-              <a:t>Hosted</a:t>
-            </a:r>
-            <a:endParaRPr lang="en-US" sz="1700" dirty="0"/>
-          </a:p>
-          <a:p>
-            <a:pPr marL="0" indent="0" algn="l">
-              <a:lnSpc>
-                <a:spcPct val="110000"/>
-              </a:lnSpc>
-              <a:buNone/>
-            </a:pPr>
-            <a:r>
-              <a:rPr lang="en-US" sz="1400" dirty="0">
-                <a:solidFill>
-                  <a:srgbClr val="5E5678"/>
-                </a:solidFill>
-                <a:latin typeface="Calibri" pitchFamily="34" charset="0"/>
-                <a:ea typeface="Calibri" pitchFamily="34" charset="-122"/>
-                <a:cs typeface="Calibri" pitchFamily="34" charset="-120"/>
-              </a:rPr>
-              <a:t>Under 140 lines, with no code that could log you.</a:t>
-            </a:r>
-            <a:endParaRPr lang="en-US" sz="1700" dirty="0"/>
-          </a:p>
-        </p:txBody>
-      </p:sp>
-      <p:sp>
-        <p:nvSpPr>
-          <p:cNvPr id="27" name="Shape 18"/>
-          <p:cNvSpPr/>
-          <p:nvPr/>
-        </p:nvSpPr>
-        <p:spPr>
-          <a:xfrm>
-            <a:off x="6400800" y="5449824"/>
-            <a:ext cx="512064" cy="512064"/>
-          </a:xfrm>
-          <a:prstGeom prst="ellipse">
-            <a:avLst/>
-          </a:prstGeom>
-          <a:solidFill>
-            <a:srgbClr val="231C40"/>
-          </a:solidFill>
-          <a:ln/>
-        </p:spPr>
-        <p:txBody>
-          <a:bodyPr/>
-          <a:lstStyle/>
-          <a:p>
-            <a:endParaRPr lang="en-US"/>
-          </a:p>
-        </p:txBody>
-      </p:sp>
-      <p:pic>
-        <p:nvPicPr>
-          <p:cNvPr id="28" name="Image 7" descr="/home/claude/tarot-deck/icons/key-gold.png"/>
-          <p:cNvPicPr>
-            <a:picLocks noChangeAspect="1"/>
-          </p:cNvPicPr>
-          <p:nvPr/>
-        </p:nvPicPr>
-        <p:blipFill>
-          <a:blip r:embed="rId10"/>
-          <a:stretch>
-            <a:fillRect/>
-          </a:stretch>
-        </p:blipFill>
-        <p:spPr>
-          <a:xfrm>
-            <a:off x="6528816" y="5577840"/>
-            <a:ext cx="256032" cy="256032"/>
-          </a:xfrm>
-          <a:prstGeom prst="rect">
-            <a:avLst/>
-          </a:prstGeom>
-        </p:spPr>
-      </p:pic>
-      <p:sp>
-        <p:nvSpPr>
-          <p:cNvPr id="29" name="Text 19"/>
-          <p:cNvSpPr txBox="1"/>
-          <p:nvPr/>
-        </p:nvSpPr>
-        <p:spPr>
-          <a:xfrm>
-            <a:off x="7132320" y="5431536"/>
-            <a:ext cx="4389120" cy="914400"/>
-          </a:xfrm>
-          <a:prstGeom prst="rect">
-            <a:avLst/>
-          </a:prstGeom>
-          <a:noFill/>
-          <a:ln/>
-        </p:spPr>
-        <p:txBody>
-          <a:bodyPr wrap="square" lIns="0" tIns="0" rIns="0" bIns="0" rtlCol="0" anchor="t"/>
-          <a:lstStyle/>
-          <a:p>
-            <a:pPr marL="0" indent="0" algn="l">
-              <a:lnSpc>
-                <a:spcPct val="110000"/>
-              </a:lnSpc>
-              <a:buNone/>
-            </a:pPr>
-            <a:r>
-              <a:rPr lang="en-US" sz="1700" b="1" dirty="0">
-                <a:solidFill>
-                  <a:srgbClr val="2B2545"/>
-                </a:solidFill>
-                <a:latin typeface="Calibri" pitchFamily="34" charset="0"/>
-                <a:ea typeface="Calibri" pitchFamily="34" charset="-122"/>
-                <a:cs typeface="Calibri" pitchFamily="34" charset="-120"/>
-              </a:rPr>
-              <a:t>Tested, not promised</a:t>
-            </a:r>
-            <a:endParaRPr lang="en-US" sz="1700" dirty="0"/>
-          </a:p>
-          <a:p>
-            <a:pPr marL="0" indent="0" algn="l">
-              <a:lnSpc>
-                <a:spcPct val="110000"/>
-              </a:lnSpc>
-              <a:buNone/>
-            </a:pPr>
-            <a:r>
-              <a:rPr lang="en-US" sz="1400" dirty="0">
-                <a:solidFill>
-                  <a:srgbClr val="5E5678"/>
-                </a:solidFill>
-                <a:latin typeface="Calibri" pitchFamily="34" charset="0"/>
-                <a:ea typeface="Calibri" pitchFamily="34" charset="-122"/>
-                <a:cs typeface="Calibri" pitchFamily="34" charset="-120"/>
-              </a:rPr>
               <a:t>Tests plant a fake key; it must show up nowhere.</a:t>
             </a:r>
             <a:endParaRPr lang="en-US" sz="1700" dirty="0"/>
@@ -9178,7 +9274,7 @@
           <a:bodyPr wrap="square" lIns="0" tIns="0" rIns="0" bIns="0" rtlCol="0" anchor="ctr"/>
           <a:lstStyle/>
           <a:p>
-            <a:pPr marL="0" indent="0" algn="r">
+            <a:pPr algn="r" indent="0" marL="0">
               <a:buNone/>
             </a:pPr>
             <a:r>
@@ -9212,7 +9308,6 @@
         <a:solidFill>
           <a:srgbClr val="FFFFFF"/>
         </a:solidFill>
-        <a:effectLst/>
       </p:bgPr>
     </p:bg>
     <p:spTree>
@@ -9250,11 +9345,11 @@
           <a:bodyPr wrap="square" lIns="0" tIns="0" rIns="0" bIns="0" rtlCol="0" anchor="ctr"/>
           <a:lstStyle/>
           <a:p>
-            <a:pPr marL="0" indent="0" algn="l">
-              <a:buNone/>
-            </a:pPr>
-            <a:r>
-              <a:rPr lang="en-US" sz="1300" b="1" kern="0" spc="300" dirty="0">
+            <a:pPr algn="l" indent="0" marL="0">
+              <a:buNone/>
+            </a:pPr>
+            <a:r>
+              <a:rPr lang="en-US" sz="1300" b="1" spc="300" kern="0" dirty="0">
                 <a:solidFill>
                   <a:srgbClr val="8A6C1E"/>
                 </a:solidFill>
@@ -9289,7 +9384,7 @@
           <a:bodyPr wrap="square" lIns="0" tIns="0" rIns="0" bIns="0" rtlCol="0" anchor="ctr"/>
           <a:lstStyle/>
           <a:p>
-            <a:pPr marL="0" indent="0" algn="l">
+            <a:pPr algn="l" indent="0" marL="0">
               <a:buNone/>
             </a:pPr>
             <a:r>
@@ -9328,7 +9423,7 @@
           <a:bodyPr wrap="square" lIns="0" tIns="0" rIns="0" bIns="0" rtlCol="0" anchor="ctr"/>
           <a:lstStyle/>
           <a:p>
-            <a:pPr marL="0" indent="0">
+            <a:pPr indent="0" marL="0">
               <a:buNone/>
             </a:pPr>
             <a:r>
@@ -9372,13 +9467,6 @@
             <a:prstDash val="solid"/>
           </a:ln>
         </p:spPr>
-        <p:txBody>
-          <a:bodyPr/>
-          <a:lstStyle/>
-          <a:p>
-            <a:endParaRPr lang="en-US"/>
-          </a:p>
-        </p:txBody>
       </p:sp>
       <p:sp>
         <p:nvSpPr>
@@ -9399,24 +9487,17 @@
           </a:solidFill>
           <a:ln/>
         </p:spPr>
-        <p:txBody>
-          <a:bodyPr/>
-          <a:lstStyle/>
-          <a:p>
-            <a:endParaRPr lang="en-US"/>
-          </a:p>
-        </p:txBody>
       </p:sp>
       <p:pic>
         <p:nvPicPr>
-          <p:cNvPr id="7" name="Image 0" descr="/home/claude/tarot-deck/icons/zap-gold.png"/>
+          <p:cNvPr id="7" name="Image 0" descr="/home/claude/tarot-deck/icons/zap-gold.png">    </p:cNvPr>
           <p:cNvPicPr>
             <a:picLocks noChangeAspect="1"/>
           </p:cNvPicPr>
           <p:nvPr/>
         </p:nvPicPr>
         <p:blipFill>
-          <a:blip r:embed="rId3"/>
+          <a:blip r:embed="rId1"/>
           <a:stretch>
             <a:fillRect/>
           </a:stretch>
@@ -9452,7 +9533,7 @@
           <a:bodyPr wrap="square" lIns="0" tIns="0" rIns="0" bIns="0" rtlCol="0" anchor="ctr"/>
           <a:lstStyle/>
           <a:p>
-            <a:pPr marL="0" indent="0">
+            <a:pPr indent="0" marL="0">
               <a:buNone/>
             </a:pPr>
             <a:r>
@@ -9491,7 +9572,7 @@
           <a:bodyPr wrap="square" lIns="0" tIns="0" rIns="0" bIns="0" rtlCol="0" anchor="ctr"/>
           <a:lstStyle/>
           <a:p>
-            <a:pPr marL="0" indent="0">
+            <a:pPr indent="0" marL="0">
               <a:lnSpc>
                 <a:spcPct val="112000"/>
               </a:lnSpc>
@@ -9538,13 +9619,6 @@
             <a:prstDash val="solid"/>
           </a:ln>
         </p:spPr>
-        <p:txBody>
-          <a:bodyPr/>
-          <a:lstStyle/>
-          <a:p>
-            <a:endParaRPr lang="en-US"/>
-          </a:p>
-        </p:txBody>
       </p:sp>
       <p:sp>
         <p:nvSpPr>
@@ -9565,24 +9639,17 @@
           </a:solidFill>
           <a:ln/>
         </p:spPr>
-        <p:txBody>
-          <a:bodyPr/>
-          <a:lstStyle/>
-          <a:p>
-            <a:endParaRPr lang="en-US"/>
-          </a:p>
-        </p:txBody>
       </p:sp>
       <p:pic>
         <p:nvPicPr>
-          <p:cNvPr id="12" name="Image 1" descr="/home/claude/tarot-deck/icons/map-gold.png"/>
+          <p:cNvPr id="12" name="Image 1" descr="/home/claude/tarot-deck/icons/map-gold.png">    </p:cNvPr>
           <p:cNvPicPr>
             <a:picLocks noChangeAspect="1"/>
           </p:cNvPicPr>
           <p:nvPr/>
         </p:nvPicPr>
         <p:blipFill>
-          <a:blip r:embed="rId4"/>
+          <a:blip r:embed="rId2"/>
           <a:stretch>
             <a:fillRect/>
           </a:stretch>
@@ -9618,7 +9685,7 @@
           <a:bodyPr wrap="square" lIns="0" tIns="0" rIns="0" bIns="0" rtlCol="0" anchor="ctr"/>
           <a:lstStyle/>
           <a:p>
-            <a:pPr marL="0" indent="0">
+            <a:pPr indent="0" marL="0">
               <a:buNone/>
             </a:pPr>
             <a:r>
@@ -9657,7 +9724,7 @@
           <a:bodyPr wrap="square" lIns="0" tIns="0" rIns="0" bIns="0" rtlCol="0" anchor="ctr"/>
           <a:lstStyle/>
           <a:p>
-            <a:pPr marL="0" indent="0">
+            <a:pPr indent="0" marL="0">
               <a:lnSpc>
                 <a:spcPct val="112000"/>
               </a:lnSpc>
@@ -9704,13 +9771,6 @@
             <a:prstDash val="solid"/>
           </a:ln>
         </p:spPr>
-        <p:txBody>
-          <a:bodyPr/>
-          <a:lstStyle/>
-          <a:p>
-            <a:endParaRPr lang="en-US"/>
-          </a:p>
-        </p:txBody>
       </p:sp>
       <p:sp>
         <p:nvSpPr>
@@ -9731,24 +9791,17 @@
           </a:solidFill>
           <a:ln/>
         </p:spPr>
-        <p:txBody>
-          <a:bodyPr/>
-          <a:lstStyle/>
-          <a:p>
-            <a:endParaRPr lang="en-US"/>
-          </a:p>
-        </p:txBody>
       </p:sp>
       <p:pic>
         <p:nvPicPr>
-          <p:cNvPr id="17" name="Image 2" descr="/home/claude/tarot-deck/icons/lock-gold.png"/>
+          <p:cNvPr id="17" name="Image 2" descr="/home/claude/tarot-deck/icons/lock-gold.png">    </p:cNvPr>
           <p:cNvPicPr>
             <a:picLocks noChangeAspect="1"/>
           </p:cNvPicPr>
           <p:nvPr/>
         </p:nvPicPr>
         <p:blipFill>
-          <a:blip r:embed="rId5"/>
+          <a:blip r:embed="rId3"/>
           <a:stretch>
             <a:fillRect/>
           </a:stretch>
@@ -9784,7 +9837,7 @@
           <a:bodyPr wrap="square" lIns="0" tIns="0" rIns="0" bIns="0" rtlCol="0" anchor="ctr"/>
           <a:lstStyle/>
           <a:p>
-            <a:pPr marL="0" indent="0">
+            <a:pPr indent="0" marL="0">
               <a:buNone/>
             </a:pPr>
             <a:r>
@@ -9823,7 +9876,7 @@
           <a:bodyPr wrap="square" lIns="0" tIns="0" rIns="0" bIns="0" rtlCol="0" anchor="ctr"/>
           <a:lstStyle/>
           <a:p>
-            <a:pPr marL="0" indent="0">
+            <a:pPr indent="0" marL="0">
               <a:lnSpc>
                 <a:spcPct val="112000"/>
               </a:lnSpc>
@@ -9870,13 +9923,6 @@
             <a:prstDash val="solid"/>
           </a:ln>
         </p:spPr>
-        <p:txBody>
-          <a:bodyPr/>
-          <a:lstStyle/>
-          <a:p>
-            <a:endParaRPr lang="en-US"/>
-          </a:p>
-        </p:txBody>
       </p:sp>
       <p:sp>
         <p:nvSpPr>
@@ -9897,24 +9943,17 @@
           </a:solidFill>
           <a:ln/>
         </p:spPr>
-        <p:txBody>
-          <a:bodyPr/>
-          <a:lstStyle/>
-          <a:p>
-            <a:endParaRPr lang="en-US"/>
-          </a:p>
-        </p:txBody>
       </p:sp>
       <p:pic>
         <p:nvPicPr>
-          <p:cNvPr id="22" name="Image 3" descr="/home/claude/tarot-deck/icons/pkg-gold.png"/>
+          <p:cNvPr id="22" name="Image 3" descr="/home/claude/tarot-deck/icons/pkg-gold.png">    </p:cNvPr>
           <p:cNvPicPr>
             <a:picLocks noChangeAspect="1"/>
           </p:cNvPicPr>
           <p:nvPr/>
         </p:nvPicPr>
         <p:blipFill>
-          <a:blip r:embed="rId6"/>
+          <a:blip r:embed="rId4"/>
           <a:stretch>
             <a:fillRect/>
           </a:stretch>
@@ -9950,7 +9989,7 @@
           <a:bodyPr wrap="square" lIns="0" tIns="0" rIns="0" bIns="0" rtlCol="0" anchor="ctr"/>
           <a:lstStyle/>
           <a:p>
-            <a:pPr marL="0" indent="0">
+            <a:pPr indent="0" marL="0">
               <a:buNone/>
             </a:pPr>
             <a:r>
@@ -9989,7 +10028,7 @@
           <a:bodyPr wrap="square" lIns="0" tIns="0" rIns="0" bIns="0" rtlCol="0" anchor="ctr"/>
           <a:lstStyle/>
           <a:p>
-            <a:pPr marL="0" indent="0">
+            <a:pPr indent="0" marL="0">
               <a:lnSpc>
                 <a:spcPct val="112000"/>
               </a:lnSpc>
@@ -10031,7 +10070,7 @@
           <a:bodyPr wrap="square" lIns="0" tIns="0" rIns="0" bIns="0" rtlCol="0" anchor="ctr"/>
           <a:lstStyle/>
           <a:p>
-            <a:pPr marL="0" indent="0" algn="r">
+            <a:pPr algn="r" indent="0" marL="0">
               <a:buNone/>
             </a:pPr>
             <a:r>
@@ -10350,319 +10389,4 @@
     </a:ext>
   </a:extLst>
 </a:theme>
-</file>
-
-<file path=ppt/theme/theme2.xml><?xml version="1.0" encoding="utf-8"?>
-<a:theme xmlns:a="http://schemas.openxmlformats.org/drawingml/2006/main" name="Office Theme">
-  <a:themeElements>
-    <a:clrScheme name="Office">
-      <a:dk1>
-        <a:sysClr val="windowText" lastClr="000000"/>
-      </a:dk1>
-      <a:lt1>
-        <a:sysClr val="window" lastClr="FFFFFF"/>
-      </a:lt1>
-      <a:dk2>
-        <a:srgbClr val="0E2841"/>
-      </a:dk2>
-      <a:lt2>
-        <a:srgbClr val="E8E8E8"/>
-      </a:lt2>
-      <a:accent1>
-        <a:srgbClr val="156082"/>
-      </a:accent1>
-      <a:accent2>
-        <a:srgbClr val="E97132"/>
-      </a:accent2>
-      <a:accent3>
-        <a:srgbClr val="196B24"/>
-      </a:accent3>
-      <a:accent4>
-        <a:srgbClr val="0F9ED5"/>
-      </a:accent4>
-      <a:accent5>
-        <a:srgbClr val="A02B93"/>
-      </a:accent5>
-      <a:accent6>
-        <a:srgbClr val="4EA72E"/>
-      </a:accent6>
-      <a:hlink>
-        <a:srgbClr val="467886"/>
-      </a:hlink>
-      <a:folHlink>
-        <a:srgbClr val="96607D"/>
-      </a:folHlink>
-    </a:clrScheme>
-    <a:fontScheme name="Office">
-      <a:majorFont>
-        <a:latin typeface="Aptos Display" panose="02110004020202020204"/>
-        <a:ea typeface=""/>
-        <a:cs typeface=""/>
-        <a:font script="Jpan" typeface="游ゴシック Light"/>
-        <a:font script="Hang" typeface="맑은 고딕"/>
-        <a:font script="Hans" typeface="等线 Light"/>
-        <a:font script="Hant" typeface="新細明體"/>
-        <a:font script="Arab" typeface="Times New Roman"/>
-        <a:font script="Hebr" typeface="Times New Roman"/>
-        <a:font script="Thai" typeface="Angsana New"/>
-        <a:font script="Ethi" typeface="Nyala"/>
-        <a:font script="Beng" typeface="Vrinda"/>
-        <a:font script="Gujr" typeface="Shruti"/>
-        <a:font script="Khmr" typeface="MoolBoran"/>
-        <a:font script="Knda" typeface="Tunga"/>
-        <a:font script="Guru" typeface="Raavi"/>
-        <a:font script="Cans" typeface="Euphemia"/>
-        <a:font script="Cher" typeface="Plantagenet Cherokee"/>
-        <a:font script="Yiii" typeface="Microsoft Yi Baiti"/>
-        <a:font script="Tibt" typeface="Microsoft Himalaya"/>
-        <a:font script="Thaa" typeface="MV Boli"/>
-        <a:font script="Deva" typeface="Mangal"/>
-        <a:font script="Telu" typeface="Gautami"/>
-        <a:font script="Taml" typeface="Latha"/>
-        <a:font script="Syrc" typeface="Estrangelo Edessa"/>
-        <a:font script="Orya" typeface="Kalinga"/>
-        <a:font script="Mlym" typeface="Kartika"/>
-        <a:font script="Laoo" typeface="DokChampa"/>
-        <a:font script="Sinh" typeface="Iskoola Pota"/>
-        <a:font script="Mong" typeface="Mongolian Baiti"/>
-        <a:font script="Viet" typeface="Times New Roman"/>
-        <a:font script="Uigh" typeface="Microsoft Uighur"/>
-        <a:font script="Geor" typeface="Sylfaen"/>
-        <a:font script="Armn" typeface="Arial"/>
-        <a:font script="Bugi" typeface="Leelawadee UI"/>
-        <a:font script="Bopo" typeface="Microsoft JhengHei"/>
-        <a:font script="Java" typeface="Javanese Text"/>
-        <a:font script="Lisu" typeface="Segoe UI"/>
-        <a:font script="Mymr" typeface="Myanmar Text"/>
-        <a:font script="Nkoo" typeface="Ebrima"/>
-        <a:font script="Olck" typeface="Nirmala UI"/>
-        <a:font script="Osma" typeface="Ebrima"/>
-        <a:font script="Phag" typeface="Phagspa"/>
-        <a:font script="Syrn" typeface="Estrangelo Edessa"/>
-        <a:font script="Syrj" typeface="Estrangelo Edessa"/>
-        <a:font script="Syre" typeface="Estrangelo Edessa"/>
-        <a:font script="Sora" typeface="Nirmala UI"/>
-        <a:font script="Tale" typeface="Microsoft Tai Le"/>
-        <a:font script="Talu" typeface="Microsoft New Tai Lue"/>
-        <a:font script="Tfng" typeface="Ebrima"/>
-      </a:majorFont>
-      <a:minorFont>
-        <a:latin typeface="Aptos" panose="02110004020202020204"/>
-        <a:ea typeface=""/>
-        <a:cs typeface=""/>
-        <a:font script="Jpan" typeface="游ゴシック"/>
-        <a:font script="Hang" typeface="맑은 고딕"/>
-        <a:font script="Hans" typeface="等线"/>
-        <a:font script="Hant" typeface="新細明體"/>
-        <a:font script="Arab" typeface="Arial"/>
-        <a:font script="Hebr" typeface="Arial"/>
-        <a:font script="Thai" typeface="Cordia New"/>
-        <a:font script="Ethi" typeface="Nyala"/>
-        <a:font script="Beng" typeface="Vrinda"/>
-        <a:font script="Gujr" typeface="Shruti"/>
-        <a:font script="Khmr" typeface="DaunPenh"/>
-        <a:font script="Knda" typeface="Tunga"/>
-        <a:font script="Guru" typeface="Raavi"/>
-        <a:font script="Cans" typeface="Euphemia"/>
-        <a:font script="Cher" typeface="Plantagenet Cherokee"/>
-        <a:font script="Yiii" typeface="Microsoft Yi Baiti"/>
-        <a:font script="Tibt" typeface="Microsoft Himalaya"/>
-        <a:font script="Thaa" typeface="MV Boli"/>
-        <a:font script="Deva" typeface="Mangal"/>
-        <a:font script="Telu" typeface="Gautami"/>
-        <a:font script="Taml" typeface="Latha"/>
-        <a:font script="Syrc" typeface="Estrangelo Edessa"/>
-        <a:font script="Orya" typeface="Kalinga"/>
-        <a:font script="Mlym" typeface="Kartika"/>
-        <a:font script="Laoo" typeface="DokChampa"/>
-        <a:font script="Sinh" typeface="Iskoola Pota"/>
-        <a:font script="Mong" typeface="Mongolian Baiti"/>
-        <a:font script="Viet" typeface="Arial"/>
-        <a:font script="Uigh" typeface="Microsoft Uighur"/>
-        <a:font script="Geor" typeface="Sylfaen"/>
-        <a:font script="Armn" typeface="Arial"/>
-        <a:font script="Bugi" typeface="Leelawadee UI"/>
-        <a:font script="Bopo" typeface="Microsoft JhengHei"/>
-        <a:font script="Java" typeface="Javanese Text"/>
-        <a:font script="Lisu" typeface="Segoe UI"/>
-        <a:font script="Mymr" typeface="Myanmar Text"/>
-        <a:font script="Nkoo" typeface="Ebrima"/>
-        <a:font script="Olck" typeface="Nirmala UI"/>
-        <a:font script="Osma" typeface="Ebrima"/>
-        <a:font script="Phag" typeface="Phagspa"/>
-        <a:font script="Syrn" typeface="Estrangelo Edessa"/>
-        <a:font script="Syrj" typeface="Estrangelo Edessa"/>
-        <a:font script="Syre" typeface="Estrangelo Edessa"/>
-        <a:font script="Sora" typeface="Nirmala UI"/>
-        <a:font script="Tale" typeface="Microsoft Tai Le"/>
-        <a:font script="Talu" typeface="Microsoft New Tai Lue"/>
-        <a:font script="Tfng" typeface="Ebrima"/>
-      </a:minorFont>
-    </a:fontScheme>
-    <a:fmtScheme name="Office">
-      <a:fillStyleLst>
-        <a:solidFill>
-          <a:schemeClr val="phClr"/>
-        </a:solidFill>
-        <a:gradFill rotWithShape="1">
-          <a:gsLst>
-            <a:gs pos="0">
-              <a:schemeClr val="phClr">
-                <a:lumMod val="110000"/>
-                <a:satMod val="105000"/>
-                <a:tint val="67000"/>
-              </a:schemeClr>
-            </a:gs>
-            <a:gs pos="50000">
-              <a:schemeClr val="phClr">
-                <a:lumMod val="105000"/>
-                <a:satMod val="103000"/>
-                <a:tint val="73000"/>
-              </a:schemeClr>
-            </a:gs>
-            <a:gs pos="100000">
-              <a:schemeClr val="phClr">
-                <a:lumMod val="105000"/>
-                <a:satMod val="109000"/>
-                <a:tint val="81000"/>
-              </a:schemeClr>
-            </a:gs>
-          </a:gsLst>
-          <a:lin ang="5400000" scaled="0"/>
-        </a:gradFill>
-        <a:gradFill rotWithShape="1">
-          <a:gsLst>
-            <a:gs pos="0">
-              <a:schemeClr val="phClr">
-                <a:satMod val="103000"/>
-                <a:lumMod val="102000"/>
-                <a:tint val="94000"/>
-              </a:schemeClr>
-            </a:gs>
-            <a:gs pos="50000">
-              <a:schemeClr val="phClr">
-                <a:satMod val="110000"/>
-                <a:lumMod val="100000"/>
-                <a:shade val="100000"/>
-              </a:schemeClr>
-            </a:gs>
-            <a:gs pos="100000">
-              <a:schemeClr val="phClr">
-                <a:lumMod val="99000"/>
-                <a:satMod val="120000"/>
-                <a:shade val="78000"/>
-              </a:schemeClr>
-            </a:gs>
-          </a:gsLst>
-          <a:lin ang="5400000" scaled="0"/>
-        </a:gradFill>
-      </a:fillStyleLst>
-      <a:lnStyleLst>
-        <a:ln w="12700" cap="flat" cmpd="sng" algn="ctr">
-          <a:solidFill>
-            <a:schemeClr val="phClr"/>
-          </a:solidFill>
-          <a:prstDash val="solid"/>
-          <a:miter lim="800000"/>
-        </a:ln>
-        <a:ln w="19050" cap="flat" cmpd="sng" algn="ctr">
-          <a:solidFill>
-            <a:schemeClr val="phClr"/>
-          </a:solidFill>
-          <a:prstDash val="solid"/>
-          <a:miter lim="800000"/>
-        </a:ln>
-        <a:ln w="25400" cap="flat" cmpd="sng" algn="ctr">
-          <a:solidFill>
-            <a:schemeClr val="phClr"/>
-          </a:solidFill>
-          <a:prstDash val="solid"/>
-          <a:miter lim="800000"/>
-        </a:ln>
-      </a:lnStyleLst>
-      <a:effectStyleLst>
-        <a:effectStyle>
-          <a:effectLst/>
-        </a:effectStyle>
-        <a:effectStyle>
-          <a:effectLst/>
-        </a:effectStyle>
-        <a:effectStyle>
-          <a:effectLst>
-            <a:outerShdw blurRad="57150" dist="19050" dir="5400000" algn="ctr" rotWithShape="0">
-              <a:srgbClr val="000000">
-                <a:alpha val="63000"/>
-              </a:srgbClr>
-            </a:outerShdw>
-          </a:effectLst>
-        </a:effectStyle>
-      </a:effectStyleLst>
-      <a:bgFillStyleLst>
-        <a:solidFill>
-          <a:schemeClr val="phClr"/>
-        </a:solidFill>
-        <a:solidFill>
-          <a:schemeClr val="phClr">
-            <a:tint val="95000"/>
-            <a:satMod val="170000"/>
-          </a:schemeClr>
-        </a:solidFill>
-        <a:gradFill rotWithShape="1">
-          <a:gsLst>
-            <a:gs pos="0">
-              <a:schemeClr val="phClr">
-                <a:tint val="93000"/>
-                <a:satMod val="150000"/>
-                <a:shade val="98000"/>
-                <a:lumMod val="102000"/>
-              </a:schemeClr>
-            </a:gs>
-            <a:gs pos="50000">
-              <a:schemeClr val="phClr">
-                <a:tint val="98000"/>
-                <a:satMod val="130000"/>
-                <a:shade val="90000"/>
-                <a:lumMod val="103000"/>
-              </a:schemeClr>
-            </a:gs>
-            <a:gs pos="100000">
-              <a:schemeClr val="phClr">
-                <a:shade val="63000"/>
-                <a:satMod val="120000"/>
-              </a:schemeClr>
-            </a:gs>
-          </a:gsLst>
-          <a:lin ang="5400000" scaled="0"/>
-        </a:gradFill>
-      </a:bgFillStyleLst>
-    </a:fmtScheme>
-  </a:themeElements>
-  <a:objectDefaults>
-    <a:lnDef>
-      <a:spPr/>
-      <a:bodyPr/>
-      <a:lstStyle/>
-      <a:style>
-        <a:lnRef idx="2">
-          <a:schemeClr val="accent1"/>
-        </a:lnRef>
-        <a:fillRef idx="0">
-          <a:schemeClr val="accent1"/>
-        </a:fillRef>
-        <a:effectRef idx="1">
-          <a:schemeClr val="accent1"/>
-        </a:effectRef>
-        <a:fontRef idx="minor">
-          <a:schemeClr val="tx1"/>
-        </a:fontRef>
-      </a:style>
-    </a:lnDef>
-  </a:objectDefaults>
-  <a:extraClrSchemeLst/>
-  <a:extLst>
-    <a:ext uri="{05A4C25C-085E-4340-85A3-A5531E510DB2}">
-      <thm15:themeFamily xmlns:thm15="http://schemas.microsoft.com/office/thememl/2012/main" name="Office Theme" id="{2E142A2C-CD16-42D6-873A-C26D2A0506FA}" vid="{1BDDFF52-6CD6-40A5-AB3C-68EB2F1E4D0A}"/>
-    </a:ext>
-  </a:extLst>
-</a:theme>
 </file>